--- a/output_pptx/Agnus_Dei.pptx
+++ b/output_pptx/Agnus_Dei.pptx
@@ -3120,23 +3120,23 @@
         </p:nvSpPr>
         <p:spPr>
           <a:xfrm>
-            <a:off x="594360" y="2258568"/>
-            <a:ext cx="11002975" cy="685800"/>
-          </a:xfrm>
-          <a:prstGeom prst="rect">
-            <a:avLst/>
-          </a:prstGeom>
-          <a:noFill/>
-        </p:spPr>
-        <p:txBody>
-          <a:bodyPr wrap="square">
-            <a:spAutoFit/>
-          </a:bodyPr>
-          <a:lstStyle/>
-          <a:p>
-            <a:pPr algn="ctr"/>
-            <a:r>
-              <a:rPr sz="4400" b="1" i="0">
+            <a:off x="640080" y="2052828"/>
+            <a:ext cx="10911535" cy="731520"/>
+          </a:xfrm>
+          <a:prstGeom prst="rect">
+            <a:avLst/>
+          </a:prstGeom>
+          <a:noFill/>
+        </p:spPr>
+        <p:txBody>
+          <a:bodyPr wrap="square">
+            <a:spAutoFit/>
+          </a:bodyPr>
+          <a:lstStyle/>
+          <a:p>
+            <a:pPr algn="ctr"/>
+            <a:r>
+              <a:rPr sz="4800" b="1" i="0">
                 <a:solidFill>
                   <a:srgbClr val="FFFFFF"/>
                 </a:solidFill>
@@ -3155,29 +3155,29 @@
         </p:nvSpPr>
         <p:spPr>
           <a:xfrm>
-            <a:off x="594360" y="2980944"/>
-            <a:ext cx="11002975" cy="347472"/>
-          </a:xfrm>
-          <a:prstGeom prst="rect">
-            <a:avLst/>
-          </a:prstGeom>
-          <a:noFill/>
-        </p:spPr>
-        <p:txBody>
-          <a:bodyPr wrap="square">
-            <a:spAutoFit/>
-          </a:bodyPr>
-          <a:lstStyle/>
-          <a:p>
-            <a:pPr algn="ctr"/>
-            <a:r>
-              <a:rPr sz="2200" b="0" i="1">
-                <a:solidFill>
-                  <a:srgbClr val="8C8C8C"/>
-                </a:solidFill>
-                <a:latin typeface="Arial"/>
-              </a:rPr>
-              <a:t/>
+            <a:off x="640080" y="2985516"/>
+            <a:ext cx="10911535" cy="731520"/>
+          </a:xfrm>
+          <a:prstGeom prst="rect">
+            <a:avLst/>
+          </a:prstGeom>
+          <a:noFill/>
+        </p:spPr>
+        <p:txBody>
+          <a:bodyPr wrap="square">
+            <a:spAutoFit/>
+          </a:bodyPr>
+          <a:lstStyle/>
+          <a:p>
+            <a:pPr algn="ctr"/>
+            <a:r>
+              <a:rPr sz="4800" b="1" i="0">
+                <a:solidFill>
+                  <a:srgbClr val="FFFFFF"/>
+                </a:solidFill>
+                <a:latin typeface="Arial"/>
+              </a:rPr>
+              <a:t>Aleluia, Aleluia</a:t>
             </a:r>
           </a:p>
         </p:txBody>
@@ -3190,29 +3190,29 @@
         </p:nvSpPr>
         <p:spPr>
           <a:xfrm>
-            <a:off x="594360" y="3529584"/>
-            <a:ext cx="11002975" cy="685800"/>
-          </a:xfrm>
-          <a:prstGeom prst="rect">
-            <a:avLst/>
-          </a:prstGeom>
-          <a:noFill/>
-        </p:spPr>
-        <p:txBody>
-          <a:bodyPr wrap="square">
-            <a:spAutoFit/>
-          </a:bodyPr>
-          <a:lstStyle/>
-          <a:p>
-            <a:pPr algn="ctr"/>
-            <a:r>
-              <a:rPr sz="4400" b="1" i="0">
-                <a:solidFill>
-                  <a:srgbClr val="FFFFFF"/>
-                </a:solidFill>
-                <a:latin typeface="Arial"/>
-              </a:rPr>
-              <a:t>Aleluia, Aleluia</a:t>
+            <a:off x="640080" y="4128516"/>
+            <a:ext cx="10911535" cy="310896"/>
+          </a:xfrm>
+          <a:prstGeom prst="rect">
+            <a:avLst/>
+          </a:prstGeom>
+          <a:noFill/>
+        </p:spPr>
+        <p:txBody>
+          <a:bodyPr wrap="square">
+            <a:spAutoFit/>
+          </a:bodyPr>
+          <a:lstStyle/>
+          <a:p>
+            <a:pPr algn="ctr"/>
+            <a:r>
+              <a:rPr sz="2000" b="0" i="0">
+                <a:solidFill>
+                  <a:srgbClr val="828282"/>
+                </a:solidFill>
+                <a:latin typeface="Arial"/>
+              </a:rPr>
+              <a:t>ハレ - ル - ヤ,　ハレ - ル - ヤ</a:t>
             </a:r>
           </a:p>
         </p:txBody>
@@ -3225,29 +3225,29 @@
         </p:nvSpPr>
         <p:spPr>
           <a:xfrm>
-            <a:off x="594360" y="4251960"/>
-            <a:ext cx="11002975" cy="347472"/>
-          </a:xfrm>
-          <a:prstGeom prst="rect">
-            <a:avLst/>
-          </a:prstGeom>
-          <a:noFill/>
-        </p:spPr>
-        <p:txBody>
-          <a:bodyPr wrap="square">
-            <a:spAutoFit/>
-          </a:bodyPr>
-          <a:lstStyle/>
-          <a:p>
-            <a:pPr algn="ctr"/>
-            <a:r>
-              <a:rPr sz="2200" b="0" i="1">
-                <a:solidFill>
-                  <a:srgbClr val="8C8C8C"/>
-                </a:solidFill>
-                <a:latin typeface="Arial"/>
-              </a:rPr>
-              <a:t/>
+            <a:off x="640080" y="4494276"/>
+            <a:ext cx="10911535" cy="310896"/>
+          </a:xfrm>
+          <a:prstGeom prst="rect">
+            <a:avLst/>
+          </a:prstGeom>
+          <a:noFill/>
+        </p:spPr>
+        <p:txBody>
+          <a:bodyPr wrap="square">
+            <a:spAutoFit/>
+          </a:bodyPr>
+          <a:lstStyle/>
+          <a:p>
+            <a:pPr algn="ctr"/>
+            <a:r>
+              <a:rPr sz="2000" b="0" i="0">
+                <a:solidFill>
+                  <a:srgbClr val="828282"/>
+                </a:solidFill>
+                <a:latin typeface="Arial"/>
+              </a:rPr>
+              <a:t>ぜんのう の　おうなるしゅ</a:t>
             </a:r>
           </a:p>
         </p:txBody>
@@ -3286,23 +3286,23 @@
         </p:nvSpPr>
         <p:spPr>
           <a:xfrm>
-            <a:off x="594360" y="1837944"/>
-            <a:ext cx="11002975" cy="685800"/>
-          </a:xfrm>
-          <a:prstGeom prst="rect">
-            <a:avLst/>
-          </a:prstGeom>
-          <a:noFill/>
-        </p:spPr>
-        <p:txBody>
-          <a:bodyPr wrap="square">
-            <a:spAutoFit/>
-          </a:bodyPr>
-          <a:lstStyle/>
-          <a:p>
-            <a:pPr algn="ctr"/>
-            <a:r>
-              <a:rPr sz="4400" b="1" i="0">
+            <a:off x="640080" y="1650492"/>
+            <a:ext cx="10911535" cy="731520"/>
+          </a:xfrm>
+          <a:prstGeom prst="rect">
+            <a:avLst/>
+          </a:prstGeom>
+          <a:noFill/>
+        </p:spPr>
+        <p:txBody>
+          <a:bodyPr wrap="square">
+            <a:spAutoFit/>
+          </a:bodyPr>
+          <a:lstStyle/>
+          <a:p>
+            <a:pPr algn="ctr"/>
+            <a:r>
+              <a:rPr sz="4800" b="1" i="0">
                 <a:solidFill>
                   <a:srgbClr val="FFFFFF"/>
                 </a:solidFill>
@@ -3321,8 +3321,8 @@
         </p:nvSpPr>
         <p:spPr>
           <a:xfrm>
-            <a:off x="594360" y="2560320"/>
-            <a:ext cx="11002975" cy="384048"/>
+            <a:off x="640080" y="2418588"/>
+            <a:ext cx="10911535" cy="365760"/>
           </a:xfrm>
           <a:prstGeom prst="rect">
             <a:avLst/>
@@ -3339,7 +3339,7 @@
             <a:r>
               <a:rPr sz="2400" b="0" i="1">
                 <a:solidFill>
-                  <a:srgbClr val="B4B4B4"/>
+                  <a:srgbClr val="AAAAAA"/>
                 </a:solidFill>
                 <a:latin typeface="Arial"/>
               </a:rPr>
@@ -3356,8 +3356,78 @@
         </p:nvSpPr>
         <p:spPr>
           <a:xfrm>
-            <a:off x="594360" y="2980944"/>
-            <a:ext cx="11002975" cy="347472"/>
+            <a:off x="640080" y="2985516"/>
+            <a:ext cx="10911535" cy="731520"/>
+          </a:xfrm>
+          <a:prstGeom prst="rect">
+            <a:avLst/>
+          </a:prstGeom>
+          <a:noFill/>
+        </p:spPr>
+        <p:txBody>
+          <a:bodyPr wrap="square">
+            <a:spAutoFit/>
+          </a:bodyPr>
+          <a:lstStyle/>
+          <a:p>
+            <a:pPr algn="ctr"/>
+            <a:r>
+              <a:rPr sz="4800" b="1" i="0">
+                <a:solidFill>
+                  <a:srgbClr val="FFFFFF"/>
+                </a:solidFill>
+                <a:latin typeface="Arial"/>
+              </a:rPr>
+              <a:t>ほまれあれ</a:t>
+            </a:r>
+          </a:p>
+        </p:txBody>
+      </p:sp>
+      <p:sp>
+        <p:nvSpPr>
+          <p:cNvPr id="5" name="TextBox 4"/>
+          <p:cNvSpPr txBox="1"/>
+          <p:nvPr/>
+        </p:nvSpPr>
+        <p:spPr>
+          <a:xfrm>
+            <a:off x="640080" y="3753612"/>
+            <a:ext cx="10911535" cy="365760"/>
+          </a:xfrm>
+          <a:prstGeom prst="rect">
+            <a:avLst/>
+          </a:prstGeom>
+          <a:noFill/>
+        </p:spPr>
+        <p:txBody>
+          <a:bodyPr wrap="square">
+            <a:spAutoFit/>
+          </a:bodyPr>
+          <a:lstStyle/>
+          <a:p>
+            <a:pPr algn="ctr"/>
+            <a:r>
+              <a:rPr sz="2400" b="0" i="1">
+                <a:solidFill>
+                  <a:srgbClr val="AAAAAA"/>
+                </a:solidFill>
+                <a:latin typeface="Arial"/>
+              </a:rPr>
+              <a:t>homare are</a:t>
+            </a:r>
+          </a:p>
+        </p:txBody>
+      </p:sp>
+      <p:sp>
+        <p:nvSpPr>
+          <p:cNvPr id="6" name="TextBox 5"/>
+          <p:cNvSpPr txBox="1"/>
+          <p:nvPr/>
+        </p:nvSpPr>
+        <p:spPr>
+          <a:xfrm>
+            <a:off x="640080" y="4530852"/>
+            <a:ext cx="10911535" cy="310896"/>
           </a:xfrm>
           <a:prstGeom prst="rect">
             <a:avLst/>
@@ -3374,81 +3444,11 @@
             <a:r>
               <a:rPr sz="2000" b="0" i="1">
                 <a:solidFill>
-                  <a:srgbClr val="8C8C8C"/>
-                </a:solidFill>
-                <a:latin typeface="Arial"/>
-              </a:rPr>
-              <a:t/>
-            </a:r>
-          </a:p>
-        </p:txBody>
-      </p:sp>
-      <p:sp>
-        <p:nvSpPr>
-          <p:cNvPr id="5" name="TextBox 4"/>
-          <p:cNvSpPr txBox="1"/>
-          <p:nvPr/>
-        </p:nvSpPr>
-        <p:spPr>
-          <a:xfrm>
-            <a:off x="594360" y="3529584"/>
-            <a:ext cx="11002975" cy="685800"/>
-          </a:xfrm>
-          <a:prstGeom prst="rect">
-            <a:avLst/>
-          </a:prstGeom>
-          <a:noFill/>
-        </p:spPr>
-        <p:txBody>
-          <a:bodyPr wrap="square">
-            <a:spAutoFit/>
-          </a:bodyPr>
-          <a:lstStyle/>
-          <a:p>
-            <a:pPr algn="ctr"/>
-            <a:r>
-              <a:rPr sz="4400" b="1" i="0">
-                <a:solidFill>
-                  <a:srgbClr val="FFFFFF"/>
-                </a:solidFill>
-                <a:latin typeface="Arial"/>
-              </a:rPr>
-              <a:t>ほまれあれ</a:t>
-            </a:r>
-          </a:p>
-        </p:txBody>
-      </p:sp>
-      <p:sp>
-        <p:nvSpPr>
-          <p:cNvPr id="6" name="TextBox 5"/>
-          <p:cNvSpPr txBox="1"/>
-          <p:nvPr/>
-        </p:nvSpPr>
-        <p:spPr>
-          <a:xfrm>
-            <a:off x="594360" y="4251960"/>
-            <a:ext cx="11002975" cy="384048"/>
-          </a:xfrm>
-          <a:prstGeom prst="rect">
-            <a:avLst/>
-          </a:prstGeom>
-          <a:noFill/>
-        </p:spPr>
-        <p:txBody>
-          <a:bodyPr wrap="square">
-            <a:spAutoFit/>
-          </a:bodyPr>
-          <a:lstStyle/>
-          <a:p>
-            <a:pPr algn="ctr"/>
-            <a:r>
-              <a:rPr sz="2400" b="0" i="1">
-                <a:solidFill>
-                  <a:srgbClr val="B4B4B4"/>
-                </a:solidFill>
-                <a:latin typeface="Arial"/>
-              </a:rPr>
-              <a:t>homare are</a:t>
+                  <a:srgbClr val="828282"/>
+                </a:solidFill>
+                <a:latin typeface="Arial"/>
+              </a:rPr>
+              <a:t>Aleluia</a:t>
             </a:r>
           </a:p>
         </p:txBody>
@@ -3461,8 +3461,8 @@
         </p:nvSpPr>
         <p:spPr>
           <a:xfrm>
-            <a:off x="594360" y="4672584"/>
-            <a:ext cx="11002975" cy="347472"/>
+            <a:off x="640080" y="4896612"/>
+            <a:ext cx="10911535" cy="310896"/>
           </a:xfrm>
           <a:prstGeom prst="rect">
             <a:avLst/>
@@ -3479,11 +3479,11 @@
             <a:r>
               <a:rPr sz="2000" b="0" i="1">
                 <a:solidFill>
-                  <a:srgbClr val="8C8C8C"/>
-                </a:solidFill>
-                <a:latin typeface="Arial"/>
-              </a:rPr>
-              <a:t/>
+                  <a:srgbClr val="828282"/>
+                </a:solidFill>
+                <a:latin typeface="Arial"/>
+              </a:rPr>
+              <a:t>Santo, Santo és Tu, Senhor Deus Todo-Poderoso</a:t>
             </a:r>
           </a:p>
         </p:txBody>
@@ -3522,23 +3522,23 @@
         </p:nvSpPr>
         <p:spPr>
           <a:xfrm>
-            <a:off x="594360" y="1837944"/>
-            <a:ext cx="11002975" cy="685800"/>
-          </a:xfrm>
-          <a:prstGeom prst="rect">
-            <a:avLst/>
-          </a:prstGeom>
-          <a:noFill/>
-        </p:spPr>
-        <p:txBody>
-          <a:bodyPr wrap="square">
-            <a:spAutoFit/>
-          </a:bodyPr>
-          <a:lstStyle/>
-          <a:p>
-            <a:pPr algn="ctr"/>
-            <a:r>
-              <a:rPr sz="4400" b="1" i="0">
+            <a:off x="640080" y="1650492"/>
+            <a:ext cx="10911535" cy="731520"/>
+          </a:xfrm>
+          <a:prstGeom prst="rect">
+            <a:avLst/>
+          </a:prstGeom>
+          <a:noFill/>
+        </p:spPr>
+        <p:txBody>
+          <a:bodyPr wrap="square">
+            <a:spAutoFit/>
+          </a:bodyPr>
+          <a:lstStyle/>
+          <a:p>
+            <a:pPr algn="ctr"/>
+            <a:r>
+              <a:rPr sz="4800" b="1" i="0">
                 <a:solidFill>
                   <a:srgbClr val="FFFFFF"/>
                 </a:solidFill>
@@ -3557,8 +3557,8 @@
         </p:nvSpPr>
         <p:spPr>
           <a:xfrm>
-            <a:off x="594360" y="2560320"/>
-            <a:ext cx="11002975" cy="384048"/>
+            <a:off x="640080" y="2418588"/>
+            <a:ext cx="10911535" cy="365760"/>
           </a:xfrm>
           <a:prstGeom prst="rect">
             <a:avLst/>
@@ -3575,7 +3575,7 @@
             <a:r>
               <a:rPr sz="2400" b="0" i="1">
                 <a:solidFill>
-                  <a:srgbClr val="B4B4B4"/>
+                  <a:srgbClr val="AAAAAA"/>
                 </a:solidFill>
                 <a:latin typeface="Arial"/>
               </a:rPr>
@@ -3592,8 +3592,78 @@
         </p:nvSpPr>
         <p:spPr>
           <a:xfrm>
-            <a:off x="594360" y="2980944"/>
-            <a:ext cx="11002975" cy="347472"/>
+            <a:off x="640080" y="2985516"/>
+            <a:ext cx="10911535" cy="731520"/>
+          </a:xfrm>
+          <a:prstGeom prst="rect">
+            <a:avLst/>
+          </a:prstGeom>
+          <a:noFill/>
+        </p:spPr>
+        <p:txBody>
+          <a:bodyPr wrap="square">
+            <a:spAutoFit/>
+          </a:bodyPr>
+          <a:lstStyle/>
+          <a:p>
+            <a:pPr algn="ctr"/>
+            <a:r>
+              <a:rPr sz="4800" b="1" i="0">
+                <a:solidFill>
+                  <a:srgbClr val="FFFFFF"/>
+                </a:solidFill>
+                <a:latin typeface="Arial"/>
+              </a:rPr>
+              <a:t>ぜんのう  のわがかみ</a:t>
+            </a:r>
+          </a:p>
+        </p:txBody>
+      </p:sp>
+      <p:sp>
+        <p:nvSpPr>
+          <p:cNvPr id="5" name="TextBox 4"/>
+          <p:cNvSpPr txBox="1"/>
+          <p:nvPr/>
+        </p:nvSpPr>
+        <p:spPr>
+          <a:xfrm>
+            <a:off x="640080" y="3753612"/>
+            <a:ext cx="10911535" cy="365760"/>
+          </a:xfrm>
+          <a:prstGeom prst="rect">
+            <a:avLst/>
+          </a:prstGeom>
+          <a:noFill/>
+        </p:spPr>
+        <p:txBody>
+          <a:bodyPr wrap="square">
+            <a:spAutoFit/>
+          </a:bodyPr>
+          <a:lstStyle/>
+          <a:p>
+            <a:pPr algn="ctr"/>
+            <a:r>
+              <a:rPr sz="2400" b="0" i="1">
+                <a:solidFill>
+                  <a:srgbClr val="AAAAAA"/>
+                </a:solidFill>
+                <a:latin typeface="Arial"/>
+              </a:rPr>
+              <a:t>zennou  no waga kami</a:t>
+            </a:r>
+          </a:p>
+        </p:txBody>
+      </p:sp>
+      <p:sp>
+        <p:nvSpPr>
+          <p:cNvPr id="6" name="TextBox 5"/>
+          <p:cNvSpPr txBox="1"/>
+          <p:nvPr/>
+        </p:nvSpPr>
+        <p:spPr>
+          <a:xfrm>
+            <a:off x="640080" y="4530852"/>
+            <a:ext cx="10911535" cy="310896"/>
           </a:xfrm>
           <a:prstGeom prst="rect">
             <a:avLst/>
@@ -3610,81 +3680,11 @@
             <a:r>
               <a:rPr sz="2000" b="0" i="1">
                 <a:solidFill>
-                  <a:srgbClr val="8C8C8C"/>
-                </a:solidFill>
-                <a:latin typeface="Arial"/>
-              </a:rPr>
-              <a:t/>
-            </a:r>
-          </a:p>
-        </p:txBody>
-      </p:sp>
-      <p:sp>
-        <p:nvSpPr>
-          <p:cNvPr id="5" name="TextBox 4"/>
-          <p:cNvSpPr txBox="1"/>
-          <p:nvPr/>
-        </p:nvSpPr>
-        <p:spPr>
-          <a:xfrm>
-            <a:off x="594360" y="3529584"/>
-            <a:ext cx="11002975" cy="685800"/>
-          </a:xfrm>
-          <a:prstGeom prst="rect">
-            <a:avLst/>
-          </a:prstGeom>
-          <a:noFill/>
-        </p:spPr>
-        <p:txBody>
-          <a:bodyPr wrap="square">
-            <a:spAutoFit/>
-          </a:bodyPr>
-          <a:lstStyle/>
-          <a:p>
-            <a:pPr algn="ctr"/>
-            <a:r>
-              <a:rPr sz="4400" b="1" i="0">
-                <a:solidFill>
-                  <a:srgbClr val="FFFFFF"/>
-                </a:solidFill>
-                <a:latin typeface="Arial"/>
-              </a:rPr>
-              <a:t>ぜんのう  のわがかみ</a:t>
-            </a:r>
-          </a:p>
-        </p:txBody>
-      </p:sp>
-      <p:sp>
-        <p:nvSpPr>
-          <p:cNvPr id="6" name="TextBox 5"/>
-          <p:cNvSpPr txBox="1"/>
-          <p:nvPr/>
-        </p:nvSpPr>
-        <p:spPr>
-          <a:xfrm>
-            <a:off x="594360" y="4251960"/>
-            <a:ext cx="11002975" cy="384048"/>
-          </a:xfrm>
-          <a:prstGeom prst="rect">
-            <a:avLst/>
-          </a:prstGeom>
-          <a:noFill/>
-        </p:spPr>
-        <p:txBody>
-          <a:bodyPr wrap="square">
-            <a:spAutoFit/>
-          </a:bodyPr>
-          <a:lstStyle/>
-          <a:p>
-            <a:pPr algn="ctr"/>
-            <a:r>
-              <a:rPr sz="2400" b="0" i="1">
-                <a:solidFill>
-                  <a:srgbClr val="B4B4B4"/>
-                </a:solidFill>
-                <a:latin typeface="Arial"/>
-              </a:rPr>
-              <a:t>zennou  no waga kami</a:t>
+                  <a:srgbClr val="828282"/>
+                </a:solidFill>
+                <a:latin typeface="Arial"/>
+              </a:rPr>
+              <a:t>Digno é o Cordeiro</a:t>
             </a:r>
           </a:p>
         </p:txBody>
@@ -3697,8 +3697,8 @@
         </p:nvSpPr>
         <p:spPr>
           <a:xfrm>
-            <a:off x="594360" y="4672584"/>
-            <a:ext cx="11002975" cy="347472"/>
+            <a:off x="640080" y="4896612"/>
+            <a:ext cx="10911535" cy="310896"/>
           </a:xfrm>
           <a:prstGeom prst="rect">
             <a:avLst/>
@@ -3715,11 +3715,11 @@
             <a:r>
               <a:rPr sz="2000" b="0" i="1">
                 <a:solidFill>
-                  <a:srgbClr val="8C8C8C"/>
-                </a:solidFill>
-                <a:latin typeface="Arial"/>
-              </a:rPr>
-              <a:t/>
+                  <a:srgbClr val="828282"/>
+                </a:solidFill>
+                <a:latin typeface="Arial"/>
+              </a:rPr>
+              <a:t>Digno é o Cordeiro</a:t>
             </a:r>
           </a:p>
         </p:txBody>
@@ -3758,23 +3758,23 @@
         </p:nvSpPr>
         <p:spPr>
           <a:xfrm>
-            <a:off x="594360" y="1837944"/>
-            <a:ext cx="11002975" cy="685800"/>
-          </a:xfrm>
-          <a:prstGeom prst="rect">
-            <a:avLst/>
-          </a:prstGeom>
-          <a:noFill/>
-        </p:spPr>
-        <p:txBody>
-          <a:bodyPr wrap="square">
-            <a:spAutoFit/>
-          </a:bodyPr>
-          <a:lstStyle/>
-          <a:p>
-            <a:pPr algn="ctr"/>
-            <a:r>
-              <a:rPr sz="4400" b="1" i="0">
+            <a:off x="640080" y="1650492"/>
+            <a:ext cx="10911535" cy="731520"/>
+          </a:xfrm>
+          <a:prstGeom prst="rect">
+            <a:avLst/>
+          </a:prstGeom>
+          <a:noFill/>
+        </p:spPr>
+        <p:txBody>
+          <a:bodyPr wrap="square">
+            <a:spAutoFit/>
+          </a:bodyPr>
+          <a:lstStyle/>
+          <a:p>
+            <a:pPr algn="ctr"/>
+            <a:r>
+              <a:rPr sz="4800" b="1" i="0">
                 <a:solidFill>
                   <a:srgbClr val="FFFFFF"/>
                 </a:solidFill>
@@ -3793,8 +3793,8 @@
         </p:nvSpPr>
         <p:spPr>
           <a:xfrm>
-            <a:off x="594360" y="2560320"/>
-            <a:ext cx="11002975" cy="384048"/>
+            <a:off x="640080" y="2418588"/>
+            <a:ext cx="10911535" cy="365760"/>
           </a:xfrm>
           <a:prstGeom prst="rect">
             <a:avLst/>
@@ -3811,7 +3811,7 @@
             <a:r>
               <a:rPr sz="2400" b="0" i="1">
                 <a:solidFill>
-                  <a:srgbClr val="B4B4B4"/>
+                  <a:srgbClr val="AAAAAA"/>
                 </a:solidFill>
                 <a:latin typeface="Arial"/>
               </a:rPr>
@@ -3828,8 +3828,78 @@
         </p:nvSpPr>
         <p:spPr>
           <a:xfrm>
-            <a:off x="594360" y="2980944"/>
-            <a:ext cx="11002975" cy="347472"/>
+            <a:off x="640080" y="2985516"/>
+            <a:ext cx="10911535" cy="731520"/>
+          </a:xfrm>
+          <a:prstGeom prst="rect">
+            <a:avLst/>
+          </a:prstGeom>
+          <a:noFill/>
+        </p:spPr>
+        <p:txBody>
+          <a:bodyPr wrap="square">
+            <a:spAutoFit/>
+          </a:bodyPr>
+          <a:lstStyle/>
+          <a:p>
+            <a:pPr algn="ctr"/>
+            <a:r>
+              <a:rPr sz="4800" b="1" i="0">
+                <a:solidFill>
+                  <a:srgbClr val="FFFFFF"/>
+                </a:solidFill>
+                <a:latin typeface="Arial"/>
+              </a:rPr>
+              <a:t>ほまれあれ</a:t>
+            </a:r>
+          </a:p>
+        </p:txBody>
+      </p:sp>
+      <p:sp>
+        <p:nvSpPr>
+          <p:cNvPr id="5" name="TextBox 4"/>
+          <p:cNvSpPr txBox="1"/>
+          <p:nvPr/>
+        </p:nvSpPr>
+        <p:spPr>
+          <a:xfrm>
+            <a:off x="640080" y="3753612"/>
+            <a:ext cx="10911535" cy="365760"/>
+          </a:xfrm>
+          <a:prstGeom prst="rect">
+            <a:avLst/>
+          </a:prstGeom>
+          <a:noFill/>
+        </p:spPr>
+        <p:txBody>
+          <a:bodyPr wrap="square">
+            <a:spAutoFit/>
+          </a:bodyPr>
+          <a:lstStyle/>
+          <a:p>
+            <a:pPr algn="ctr"/>
+            <a:r>
+              <a:rPr sz="2400" b="0" i="1">
+                <a:solidFill>
+                  <a:srgbClr val="AAAAAA"/>
+                </a:solidFill>
+                <a:latin typeface="Arial"/>
+              </a:rPr>
+              <a:t>homare are</a:t>
+            </a:r>
+          </a:p>
+        </p:txBody>
+      </p:sp>
+      <p:sp>
+        <p:nvSpPr>
+          <p:cNvPr id="6" name="TextBox 5"/>
+          <p:cNvSpPr txBox="1"/>
+          <p:nvPr/>
+        </p:nvSpPr>
+        <p:spPr>
+          <a:xfrm>
+            <a:off x="640080" y="4530852"/>
+            <a:ext cx="10911535" cy="310896"/>
           </a:xfrm>
           <a:prstGeom prst="rect">
             <a:avLst/>
@@ -3846,81 +3916,11 @@
             <a:r>
               <a:rPr sz="2000" b="0" i="1">
                 <a:solidFill>
-                  <a:srgbClr val="8C8C8C"/>
-                </a:solidFill>
-                <a:latin typeface="Arial"/>
-              </a:rPr>
-              <a:t/>
-            </a:r>
-          </a:p>
-        </p:txBody>
-      </p:sp>
-      <p:sp>
-        <p:nvSpPr>
-          <p:cNvPr id="5" name="TextBox 4"/>
-          <p:cNvSpPr txBox="1"/>
-          <p:nvPr/>
-        </p:nvSpPr>
-        <p:spPr>
-          <a:xfrm>
-            <a:off x="594360" y="3529584"/>
-            <a:ext cx="11002975" cy="685800"/>
-          </a:xfrm>
-          <a:prstGeom prst="rect">
-            <a:avLst/>
-          </a:prstGeom>
-          <a:noFill/>
-        </p:spPr>
-        <p:txBody>
-          <a:bodyPr wrap="square">
-            <a:spAutoFit/>
-          </a:bodyPr>
-          <a:lstStyle/>
-          <a:p>
-            <a:pPr algn="ctr"/>
-            <a:r>
-              <a:rPr sz="4400" b="1" i="0">
-                <a:solidFill>
-                  <a:srgbClr val="FFFFFF"/>
-                </a:solidFill>
-                <a:latin typeface="Arial"/>
-              </a:rPr>
-              <a:t>ほまれあれ</a:t>
-            </a:r>
-          </a:p>
-        </p:txBody>
-      </p:sp>
-      <p:sp>
-        <p:nvSpPr>
-          <p:cNvPr id="6" name="TextBox 5"/>
-          <p:cNvSpPr txBox="1"/>
-          <p:nvPr/>
-        </p:nvSpPr>
-        <p:spPr>
-          <a:xfrm>
-            <a:off x="594360" y="4251960"/>
-            <a:ext cx="11002975" cy="384048"/>
-          </a:xfrm>
-          <a:prstGeom prst="rect">
-            <a:avLst/>
-          </a:prstGeom>
-          <a:noFill/>
-        </p:spPr>
-        <p:txBody>
-          <a:bodyPr wrap="square">
-            <a:spAutoFit/>
-          </a:bodyPr>
-          <a:lstStyle/>
-          <a:p>
-            <a:pPr algn="ctr"/>
-            <a:r>
-              <a:rPr sz="2400" b="0" i="1">
-                <a:solidFill>
-                  <a:srgbClr val="B4B4B4"/>
-                </a:solidFill>
-                <a:latin typeface="Arial"/>
-              </a:rPr>
-              <a:t>homare are</a:t>
+                  <a:srgbClr val="828282"/>
+                </a:solidFill>
+                <a:latin typeface="Arial"/>
+              </a:rPr>
+              <a:t>Tu és Santo, Santo és Tu, Senhor Deus Todo-Poderoso</a:t>
             </a:r>
           </a:p>
         </p:txBody>
@@ -3933,8 +3933,8 @@
         </p:nvSpPr>
         <p:spPr>
           <a:xfrm>
-            <a:off x="594360" y="4672584"/>
-            <a:ext cx="11002975" cy="347472"/>
+            <a:off x="640080" y="4896612"/>
+            <a:ext cx="10911535" cy="310896"/>
           </a:xfrm>
           <a:prstGeom prst="rect">
             <a:avLst/>
@@ -3951,11 +3951,11 @@
             <a:r>
               <a:rPr sz="2000" b="0" i="1">
                 <a:solidFill>
-                  <a:srgbClr val="8C8C8C"/>
-                </a:solidFill>
-                <a:latin typeface="Arial"/>
-              </a:rPr>
-              <a:t/>
+                  <a:srgbClr val="828282"/>
+                </a:solidFill>
+                <a:latin typeface="Arial"/>
+              </a:rPr>
+              <a:t>Digno é o Cordeiro</a:t>
             </a:r>
           </a:p>
         </p:txBody>
@@ -3994,23 +3994,23 @@
         </p:nvSpPr>
         <p:spPr>
           <a:xfrm>
-            <a:off x="594360" y="1837944"/>
-            <a:ext cx="11002975" cy="685800"/>
-          </a:xfrm>
-          <a:prstGeom prst="rect">
-            <a:avLst/>
-          </a:prstGeom>
-          <a:noFill/>
-        </p:spPr>
-        <p:txBody>
-          <a:bodyPr wrap="square">
-            <a:spAutoFit/>
-          </a:bodyPr>
-          <a:lstStyle/>
-          <a:p>
-            <a:pPr algn="ctr"/>
-            <a:r>
-              <a:rPr sz="4400" b="1" i="0">
+            <a:off x="640080" y="1650492"/>
+            <a:ext cx="10911535" cy="731520"/>
+          </a:xfrm>
+          <a:prstGeom prst="rect">
+            <a:avLst/>
+          </a:prstGeom>
+          <a:noFill/>
+        </p:spPr>
+        <p:txBody>
+          <a:bodyPr wrap="square">
+            <a:spAutoFit/>
+          </a:bodyPr>
+          <a:lstStyle/>
+          <a:p>
+            <a:pPr algn="ctr"/>
+            <a:r>
+              <a:rPr sz="4800" b="1" i="0">
                 <a:solidFill>
                   <a:srgbClr val="FFFFFF"/>
                 </a:solidFill>
@@ -4029,8 +4029,8 @@
         </p:nvSpPr>
         <p:spPr>
           <a:xfrm>
-            <a:off x="594360" y="2560320"/>
-            <a:ext cx="11002975" cy="384048"/>
+            <a:off x="640080" y="2418588"/>
+            <a:ext cx="10911535" cy="365760"/>
           </a:xfrm>
           <a:prstGeom prst="rect">
             <a:avLst/>
@@ -4047,7 +4047,7 @@
             <a:r>
               <a:rPr sz="2400" b="0" i="1">
                 <a:solidFill>
-                  <a:srgbClr val="B4B4B4"/>
+                  <a:srgbClr val="AAAAAA"/>
                 </a:solidFill>
                 <a:latin typeface="Arial"/>
               </a:rPr>
@@ -4064,8 +4064,78 @@
         </p:nvSpPr>
         <p:spPr>
           <a:xfrm>
-            <a:off x="594360" y="2980944"/>
-            <a:ext cx="11002975" cy="347472"/>
+            <a:off x="640080" y="2985516"/>
+            <a:ext cx="10911535" cy="731520"/>
+          </a:xfrm>
+          <a:prstGeom prst="rect">
+            <a:avLst/>
+          </a:prstGeom>
+          <a:noFill/>
+        </p:spPr>
+        <p:txBody>
+          <a:bodyPr wrap="square">
+            <a:spAutoFit/>
+          </a:bodyPr>
+          <a:lstStyle/>
+          <a:p>
+            <a:pPr algn="ctr"/>
+            <a:r>
+              <a:rPr sz="4800" b="1" i="0">
+                <a:solidFill>
+                  <a:srgbClr val="FFFFFF"/>
+                </a:solidFill>
+                <a:latin typeface="Arial"/>
+              </a:rPr>
+              <a:t>ぜんのう  のわがかみ</a:t>
+            </a:r>
+          </a:p>
+        </p:txBody>
+      </p:sp>
+      <p:sp>
+        <p:nvSpPr>
+          <p:cNvPr id="5" name="TextBox 4"/>
+          <p:cNvSpPr txBox="1"/>
+          <p:nvPr/>
+        </p:nvSpPr>
+        <p:spPr>
+          <a:xfrm>
+            <a:off x="640080" y="3753612"/>
+            <a:ext cx="10911535" cy="365760"/>
+          </a:xfrm>
+          <a:prstGeom prst="rect">
+            <a:avLst/>
+          </a:prstGeom>
+          <a:noFill/>
+        </p:spPr>
+        <p:txBody>
+          <a:bodyPr wrap="square">
+            <a:spAutoFit/>
+          </a:bodyPr>
+          <a:lstStyle/>
+          <a:p>
+            <a:pPr algn="ctr"/>
+            <a:r>
+              <a:rPr sz="2400" b="0" i="1">
+                <a:solidFill>
+                  <a:srgbClr val="AAAAAA"/>
+                </a:solidFill>
+                <a:latin typeface="Arial"/>
+              </a:rPr>
+              <a:t>zennou  no waga kami</a:t>
+            </a:r>
+          </a:p>
+        </p:txBody>
+      </p:sp>
+      <p:sp>
+        <p:nvSpPr>
+          <p:cNvPr id="6" name="TextBox 5"/>
+          <p:cNvSpPr txBox="1"/>
+          <p:nvPr/>
+        </p:nvSpPr>
+        <p:spPr>
+          <a:xfrm>
+            <a:off x="640080" y="4530852"/>
+            <a:ext cx="10911535" cy="310896"/>
           </a:xfrm>
           <a:prstGeom prst="rect">
             <a:avLst/>
@@ -4082,81 +4152,11 @@
             <a:r>
               <a:rPr sz="2000" b="0" i="1">
                 <a:solidFill>
-                  <a:srgbClr val="8C8C8C"/>
-                </a:solidFill>
-                <a:latin typeface="Arial"/>
-              </a:rPr>
-              <a:t/>
-            </a:r>
-          </a:p>
-        </p:txBody>
-      </p:sp>
-      <p:sp>
-        <p:nvSpPr>
-          <p:cNvPr id="5" name="TextBox 4"/>
-          <p:cNvSpPr txBox="1"/>
-          <p:nvPr/>
-        </p:nvSpPr>
-        <p:spPr>
-          <a:xfrm>
-            <a:off x="594360" y="3529584"/>
-            <a:ext cx="11002975" cy="685800"/>
-          </a:xfrm>
-          <a:prstGeom prst="rect">
-            <a:avLst/>
-          </a:prstGeom>
-          <a:noFill/>
-        </p:spPr>
-        <p:txBody>
-          <a:bodyPr wrap="square">
-            <a:spAutoFit/>
-          </a:bodyPr>
-          <a:lstStyle/>
-          <a:p>
-            <a:pPr algn="ctr"/>
-            <a:r>
-              <a:rPr sz="4400" b="1" i="0">
-                <a:solidFill>
-                  <a:srgbClr val="FFFFFF"/>
-                </a:solidFill>
-                <a:latin typeface="Arial"/>
-              </a:rPr>
-              <a:t>ぜんのう  のわがかみ</a:t>
-            </a:r>
-          </a:p>
-        </p:txBody>
-      </p:sp>
-      <p:sp>
-        <p:nvSpPr>
-          <p:cNvPr id="6" name="TextBox 5"/>
-          <p:cNvSpPr txBox="1"/>
-          <p:nvPr/>
-        </p:nvSpPr>
-        <p:spPr>
-          <a:xfrm>
-            <a:off x="594360" y="4251960"/>
-            <a:ext cx="11002975" cy="384048"/>
-          </a:xfrm>
-          <a:prstGeom prst="rect">
-            <a:avLst/>
-          </a:prstGeom>
-          <a:noFill/>
-        </p:spPr>
-        <p:txBody>
-          <a:bodyPr wrap="square">
-            <a:spAutoFit/>
-          </a:bodyPr>
-          <a:lstStyle/>
-          <a:p>
-            <a:pPr algn="ctr"/>
-            <a:r>
-              <a:rPr sz="2400" b="0" i="1">
-                <a:solidFill>
-                  <a:srgbClr val="B4B4B4"/>
-                </a:solidFill>
-                <a:latin typeface="Arial"/>
-              </a:rPr>
-              <a:t>zennou  no waga kami</a:t>
+                  <a:srgbClr val="828282"/>
+                </a:solidFill>
+                <a:latin typeface="Arial"/>
+              </a:rPr>
+              <a:t>Aleluia, Aleluia</a:t>
             </a:r>
           </a:p>
         </p:txBody>
@@ -4169,8 +4169,8 @@
         </p:nvSpPr>
         <p:spPr>
           <a:xfrm>
-            <a:off x="594360" y="4672584"/>
-            <a:ext cx="11002975" cy="347472"/>
+            <a:off x="640080" y="4896612"/>
+            <a:ext cx="10911535" cy="310896"/>
           </a:xfrm>
           <a:prstGeom prst="rect">
             <a:avLst/>
@@ -4187,11 +4187,11 @@
             <a:r>
               <a:rPr sz="2000" b="0" i="1">
                 <a:solidFill>
-                  <a:srgbClr val="8C8C8C"/>
-                </a:solidFill>
-                <a:latin typeface="Arial"/>
-              </a:rPr>
-              <a:t/>
+                  <a:srgbClr val="828282"/>
+                </a:solidFill>
+                <a:latin typeface="Arial"/>
+              </a:rPr>
+              <a:t>Pois o Senhor Deus Todo-Poderoso reina</a:t>
             </a:r>
           </a:p>
         </p:txBody>
@@ -4230,23 +4230,23 @@
         </p:nvSpPr>
         <p:spPr>
           <a:xfrm>
-            <a:off x="594360" y="1837944"/>
-            <a:ext cx="11002975" cy="685800"/>
-          </a:xfrm>
-          <a:prstGeom prst="rect">
-            <a:avLst/>
-          </a:prstGeom>
-          <a:noFill/>
-        </p:spPr>
-        <p:txBody>
-          <a:bodyPr wrap="square">
-            <a:spAutoFit/>
-          </a:bodyPr>
-          <a:lstStyle/>
-          <a:p>
-            <a:pPr algn="ctr"/>
-            <a:r>
-              <a:rPr sz="4400" b="1" i="0">
+            <a:off x="640080" y="1650492"/>
+            <a:ext cx="10911535" cy="731520"/>
+          </a:xfrm>
+          <a:prstGeom prst="rect">
+            <a:avLst/>
+          </a:prstGeom>
+          <a:noFill/>
+        </p:spPr>
+        <p:txBody>
+          <a:bodyPr wrap="square">
+            <a:spAutoFit/>
+          </a:bodyPr>
+          <a:lstStyle/>
+          <a:p>
+            <a:pPr algn="ctr"/>
+            <a:r>
+              <a:rPr sz="4800" b="1" i="0">
                 <a:solidFill>
                   <a:srgbClr val="FFFFFF"/>
                 </a:solidFill>
@@ -4265,8 +4265,8 @@
         </p:nvSpPr>
         <p:spPr>
           <a:xfrm>
-            <a:off x="594360" y="2560320"/>
-            <a:ext cx="11002975" cy="384048"/>
+            <a:off x="640080" y="2418588"/>
+            <a:ext cx="10911535" cy="365760"/>
           </a:xfrm>
           <a:prstGeom prst="rect">
             <a:avLst/>
@@ -4283,7 +4283,7 @@
             <a:r>
               <a:rPr sz="2400" b="0" i="1">
                 <a:solidFill>
-                  <a:srgbClr val="B4B4B4"/>
+                  <a:srgbClr val="AAAAAA"/>
                 </a:solidFill>
                 <a:latin typeface="Arial"/>
               </a:rPr>
@@ -4300,8 +4300,78 @@
         </p:nvSpPr>
         <p:spPr>
           <a:xfrm>
-            <a:off x="594360" y="2980944"/>
-            <a:ext cx="11002975" cy="347472"/>
+            <a:off x="640080" y="2985516"/>
+            <a:ext cx="10911535" cy="731520"/>
+          </a:xfrm>
+          <a:prstGeom prst="rect">
+            <a:avLst/>
+          </a:prstGeom>
+          <a:noFill/>
+        </p:spPr>
+        <p:txBody>
+          <a:bodyPr wrap="square">
+            <a:spAutoFit/>
+          </a:bodyPr>
+          <a:lstStyle/>
+          <a:p>
+            <a:pPr algn="ctr"/>
+            <a:r>
+              <a:rPr sz="4800" b="1" i="0">
+                <a:solidFill>
+                  <a:srgbClr val="FFFFFF"/>
+                </a:solidFill>
+                <a:latin typeface="Arial"/>
+              </a:rPr>
+              <a:t>ほまれあれ</a:t>
+            </a:r>
+          </a:p>
+        </p:txBody>
+      </p:sp>
+      <p:sp>
+        <p:nvSpPr>
+          <p:cNvPr id="5" name="TextBox 4"/>
+          <p:cNvSpPr txBox="1"/>
+          <p:nvPr/>
+        </p:nvSpPr>
+        <p:spPr>
+          <a:xfrm>
+            <a:off x="640080" y="3753612"/>
+            <a:ext cx="10911535" cy="365760"/>
+          </a:xfrm>
+          <a:prstGeom prst="rect">
+            <a:avLst/>
+          </a:prstGeom>
+          <a:noFill/>
+        </p:spPr>
+        <p:txBody>
+          <a:bodyPr wrap="square">
+            <a:spAutoFit/>
+          </a:bodyPr>
+          <a:lstStyle/>
+          <a:p>
+            <a:pPr algn="ctr"/>
+            <a:r>
+              <a:rPr sz="2400" b="0" i="1">
+                <a:solidFill>
+                  <a:srgbClr val="AAAAAA"/>
+                </a:solidFill>
+                <a:latin typeface="Arial"/>
+              </a:rPr>
+              <a:t>homare are</a:t>
+            </a:r>
+          </a:p>
+        </p:txBody>
+      </p:sp>
+      <p:sp>
+        <p:nvSpPr>
+          <p:cNvPr id="6" name="TextBox 5"/>
+          <p:cNvSpPr txBox="1"/>
+          <p:nvPr/>
+        </p:nvSpPr>
+        <p:spPr>
+          <a:xfrm>
+            <a:off x="640080" y="4530852"/>
+            <a:ext cx="10911535" cy="310896"/>
           </a:xfrm>
           <a:prstGeom prst="rect">
             <a:avLst/>
@@ -4318,81 +4388,11 @@
             <a:r>
               <a:rPr sz="2000" b="0" i="1">
                 <a:solidFill>
-                  <a:srgbClr val="8C8C8C"/>
-                </a:solidFill>
-                <a:latin typeface="Arial"/>
-              </a:rPr>
-              <a:t/>
-            </a:r>
-          </a:p>
-        </p:txBody>
-      </p:sp>
-      <p:sp>
-        <p:nvSpPr>
-          <p:cNvPr id="5" name="TextBox 4"/>
-          <p:cNvSpPr txBox="1"/>
-          <p:nvPr/>
-        </p:nvSpPr>
-        <p:spPr>
-          <a:xfrm>
-            <a:off x="594360" y="3529584"/>
-            <a:ext cx="11002975" cy="685800"/>
-          </a:xfrm>
-          <a:prstGeom prst="rect">
-            <a:avLst/>
-          </a:prstGeom>
-          <a:noFill/>
-        </p:spPr>
-        <p:txBody>
-          <a:bodyPr wrap="square">
-            <a:spAutoFit/>
-          </a:bodyPr>
-          <a:lstStyle/>
-          <a:p>
-            <a:pPr algn="ctr"/>
-            <a:r>
-              <a:rPr sz="4400" b="1" i="0">
-                <a:solidFill>
-                  <a:srgbClr val="FFFFFF"/>
-                </a:solidFill>
-                <a:latin typeface="Arial"/>
-              </a:rPr>
-              <a:t>ほまれあれ</a:t>
-            </a:r>
-          </a:p>
-        </p:txBody>
-      </p:sp>
-      <p:sp>
-        <p:nvSpPr>
-          <p:cNvPr id="6" name="TextBox 5"/>
-          <p:cNvSpPr txBox="1"/>
-          <p:nvPr/>
-        </p:nvSpPr>
-        <p:spPr>
-          <a:xfrm>
-            <a:off x="594360" y="4251960"/>
-            <a:ext cx="11002975" cy="384048"/>
-          </a:xfrm>
-          <a:prstGeom prst="rect">
-            <a:avLst/>
-          </a:prstGeom>
-          <a:noFill/>
-        </p:spPr>
-        <p:txBody>
-          <a:bodyPr wrap="square">
-            <a:spAutoFit/>
-          </a:bodyPr>
-          <a:lstStyle/>
-          <a:p>
-            <a:pPr algn="ctr"/>
-            <a:r>
-              <a:rPr sz="2400" b="0" i="1">
-                <a:solidFill>
-                  <a:srgbClr val="B4B4B4"/>
-                </a:solidFill>
-                <a:latin typeface="Arial"/>
-              </a:rPr>
-              <a:t>homare are</a:t>
+                  <a:srgbClr val="828282"/>
+                </a:solidFill>
+                <a:latin typeface="Arial"/>
+              </a:rPr>
+              <a:t>Aleluia</a:t>
             </a:r>
           </a:p>
         </p:txBody>
@@ -4405,8 +4405,8 @@
         </p:nvSpPr>
         <p:spPr>
           <a:xfrm>
-            <a:off x="594360" y="4672584"/>
-            <a:ext cx="11002975" cy="347472"/>
+            <a:off x="640080" y="4896612"/>
+            <a:ext cx="10911535" cy="310896"/>
           </a:xfrm>
           <a:prstGeom prst="rect">
             <a:avLst/>
@@ -4423,11 +4423,11 @@
             <a:r>
               <a:rPr sz="2000" b="0" i="1">
                 <a:solidFill>
-                  <a:srgbClr val="8C8C8C"/>
-                </a:solidFill>
-                <a:latin typeface="Arial"/>
-              </a:rPr>
-              <a:t/>
+                  <a:srgbClr val="828282"/>
+                </a:solidFill>
+                <a:latin typeface="Arial"/>
+              </a:rPr>
+              <a:t>Santo, Santo és Tu, Senhor Deus Todo-Poderoso</a:t>
             </a:r>
           </a:p>
         </p:txBody>
@@ -4466,23 +4466,23 @@
         </p:nvSpPr>
         <p:spPr>
           <a:xfrm>
-            <a:off x="594360" y="1837944"/>
-            <a:ext cx="11002975" cy="685800"/>
-          </a:xfrm>
-          <a:prstGeom prst="rect">
-            <a:avLst/>
-          </a:prstGeom>
-          <a:noFill/>
-        </p:spPr>
-        <p:txBody>
-          <a:bodyPr wrap="square">
-            <a:spAutoFit/>
-          </a:bodyPr>
-          <a:lstStyle/>
-          <a:p>
-            <a:pPr algn="ctr"/>
-            <a:r>
-              <a:rPr sz="4400" b="1" i="0">
+            <a:off x="640080" y="1650492"/>
+            <a:ext cx="10911535" cy="731520"/>
+          </a:xfrm>
+          <a:prstGeom prst="rect">
+            <a:avLst/>
+          </a:prstGeom>
+          <a:noFill/>
+        </p:spPr>
+        <p:txBody>
+          <a:bodyPr wrap="square">
+            <a:spAutoFit/>
+          </a:bodyPr>
+          <a:lstStyle/>
+          <a:p>
+            <a:pPr algn="ctr"/>
+            <a:r>
+              <a:rPr sz="4800" b="1" i="0">
                 <a:solidFill>
                   <a:srgbClr val="FFFFFF"/>
                 </a:solidFill>
@@ -4501,8 +4501,8 @@
         </p:nvSpPr>
         <p:spPr>
           <a:xfrm>
-            <a:off x="594360" y="2560320"/>
-            <a:ext cx="11002975" cy="384048"/>
+            <a:off x="640080" y="2418588"/>
+            <a:ext cx="10911535" cy="365760"/>
           </a:xfrm>
           <a:prstGeom prst="rect">
             <a:avLst/>
@@ -4519,7 +4519,7 @@
             <a:r>
               <a:rPr sz="2400" b="0" i="1">
                 <a:solidFill>
-                  <a:srgbClr val="B4B4B4"/>
+                  <a:srgbClr val="AAAAAA"/>
                 </a:solidFill>
                 <a:latin typeface="Arial"/>
               </a:rPr>
@@ -4536,8 +4536,78 @@
         </p:nvSpPr>
         <p:spPr>
           <a:xfrm>
-            <a:off x="594360" y="2980944"/>
-            <a:ext cx="11002975" cy="347472"/>
+            <a:off x="640080" y="2985516"/>
+            <a:ext cx="10911535" cy="731520"/>
+          </a:xfrm>
+          <a:prstGeom prst="rect">
+            <a:avLst/>
+          </a:prstGeom>
+          <a:noFill/>
+        </p:spPr>
+        <p:txBody>
+          <a:bodyPr wrap="square">
+            <a:spAutoFit/>
+          </a:bodyPr>
+          <a:lstStyle/>
+          <a:p>
+            <a:pPr algn="ctr"/>
+            <a:r>
+              <a:rPr sz="4800" b="1" i="0">
+                <a:solidFill>
+                  <a:srgbClr val="FFFFFF"/>
+                </a:solidFill>
+                <a:latin typeface="Arial"/>
+              </a:rPr>
+              <a:t>ぜんのう  のわがかみ</a:t>
+            </a:r>
+          </a:p>
+        </p:txBody>
+      </p:sp>
+      <p:sp>
+        <p:nvSpPr>
+          <p:cNvPr id="5" name="TextBox 4"/>
+          <p:cNvSpPr txBox="1"/>
+          <p:nvPr/>
+        </p:nvSpPr>
+        <p:spPr>
+          <a:xfrm>
+            <a:off x="640080" y="3753612"/>
+            <a:ext cx="10911535" cy="365760"/>
+          </a:xfrm>
+          <a:prstGeom prst="rect">
+            <a:avLst/>
+          </a:prstGeom>
+          <a:noFill/>
+        </p:spPr>
+        <p:txBody>
+          <a:bodyPr wrap="square">
+            <a:spAutoFit/>
+          </a:bodyPr>
+          <a:lstStyle/>
+          <a:p>
+            <a:pPr algn="ctr"/>
+            <a:r>
+              <a:rPr sz="2400" b="0" i="1">
+                <a:solidFill>
+                  <a:srgbClr val="AAAAAA"/>
+                </a:solidFill>
+                <a:latin typeface="Arial"/>
+              </a:rPr>
+              <a:t>zennou  no waga kami</a:t>
+            </a:r>
+          </a:p>
+        </p:txBody>
+      </p:sp>
+      <p:sp>
+        <p:nvSpPr>
+          <p:cNvPr id="6" name="TextBox 5"/>
+          <p:cNvSpPr txBox="1"/>
+          <p:nvPr/>
+        </p:nvSpPr>
+        <p:spPr>
+          <a:xfrm>
+            <a:off x="640080" y="4530852"/>
+            <a:ext cx="10911535" cy="310896"/>
           </a:xfrm>
           <a:prstGeom prst="rect">
             <a:avLst/>
@@ -4554,81 +4624,11 @@
             <a:r>
               <a:rPr sz="2000" b="0" i="1">
                 <a:solidFill>
-                  <a:srgbClr val="8C8C8C"/>
-                </a:solidFill>
-                <a:latin typeface="Arial"/>
-              </a:rPr>
-              <a:t/>
-            </a:r>
-          </a:p>
-        </p:txBody>
-      </p:sp>
-      <p:sp>
-        <p:nvSpPr>
-          <p:cNvPr id="5" name="TextBox 4"/>
-          <p:cNvSpPr txBox="1"/>
-          <p:nvPr/>
-        </p:nvSpPr>
-        <p:spPr>
-          <a:xfrm>
-            <a:off x="594360" y="3529584"/>
-            <a:ext cx="11002975" cy="685800"/>
-          </a:xfrm>
-          <a:prstGeom prst="rect">
-            <a:avLst/>
-          </a:prstGeom>
-          <a:noFill/>
-        </p:spPr>
-        <p:txBody>
-          <a:bodyPr wrap="square">
-            <a:spAutoFit/>
-          </a:bodyPr>
-          <a:lstStyle/>
-          <a:p>
-            <a:pPr algn="ctr"/>
-            <a:r>
-              <a:rPr sz="4400" b="1" i="0">
-                <a:solidFill>
-                  <a:srgbClr val="FFFFFF"/>
-                </a:solidFill>
-                <a:latin typeface="Arial"/>
-              </a:rPr>
-              <a:t>ぜんのう  のわがかみ</a:t>
-            </a:r>
-          </a:p>
-        </p:txBody>
-      </p:sp>
-      <p:sp>
-        <p:nvSpPr>
-          <p:cNvPr id="6" name="TextBox 5"/>
-          <p:cNvSpPr txBox="1"/>
-          <p:nvPr/>
-        </p:nvSpPr>
-        <p:spPr>
-          <a:xfrm>
-            <a:off x="594360" y="4251960"/>
-            <a:ext cx="11002975" cy="384048"/>
-          </a:xfrm>
-          <a:prstGeom prst="rect">
-            <a:avLst/>
-          </a:prstGeom>
-          <a:noFill/>
-        </p:spPr>
-        <p:txBody>
-          <a:bodyPr wrap="square">
-            <a:spAutoFit/>
-          </a:bodyPr>
-          <a:lstStyle/>
-          <a:p>
-            <a:pPr algn="ctr"/>
-            <a:r>
-              <a:rPr sz="2400" b="0" i="1">
-                <a:solidFill>
-                  <a:srgbClr val="B4B4B4"/>
-                </a:solidFill>
-                <a:latin typeface="Arial"/>
-              </a:rPr>
-              <a:t>zennou  no waga kami</a:t>
+                  <a:srgbClr val="828282"/>
+                </a:solidFill>
+                <a:latin typeface="Arial"/>
+              </a:rPr>
+              <a:t>Digno é o Cordeiro</a:t>
             </a:r>
           </a:p>
         </p:txBody>
@@ -4641,8 +4641,8 @@
         </p:nvSpPr>
         <p:spPr>
           <a:xfrm>
-            <a:off x="594360" y="4672584"/>
-            <a:ext cx="11002975" cy="347472"/>
+            <a:off x="640080" y="4896612"/>
+            <a:ext cx="10911535" cy="310896"/>
           </a:xfrm>
           <a:prstGeom prst="rect">
             <a:avLst/>
@@ -4659,11 +4659,11 @@
             <a:r>
               <a:rPr sz="2000" b="0" i="1">
                 <a:solidFill>
-                  <a:srgbClr val="8C8C8C"/>
-                </a:solidFill>
-                <a:latin typeface="Arial"/>
-              </a:rPr>
-              <a:t/>
+                  <a:srgbClr val="828282"/>
+                </a:solidFill>
+                <a:latin typeface="Arial"/>
+              </a:rPr>
+              <a:t>Digno é o Cordeiro</a:t>
             </a:r>
           </a:p>
         </p:txBody>
@@ -4702,23 +4702,23 @@
         </p:nvSpPr>
         <p:spPr>
           <a:xfrm>
-            <a:off x="594360" y="1837944"/>
-            <a:ext cx="11002975" cy="685800"/>
-          </a:xfrm>
-          <a:prstGeom prst="rect">
-            <a:avLst/>
-          </a:prstGeom>
-          <a:noFill/>
-        </p:spPr>
-        <p:txBody>
-          <a:bodyPr wrap="square">
-            <a:spAutoFit/>
-          </a:bodyPr>
-          <a:lstStyle/>
-          <a:p>
-            <a:pPr algn="ctr"/>
-            <a:r>
-              <a:rPr sz="4400" b="1" i="0">
+            <a:off x="640080" y="1650492"/>
+            <a:ext cx="10911535" cy="731520"/>
+          </a:xfrm>
+          <a:prstGeom prst="rect">
+            <a:avLst/>
+          </a:prstGeom>
+          <a:noFill/>
+        </p:spPr>
+        <p:txBody>
+          <a:bodyPr wrap="square">
+            <a:spAutoFit/>
+          </a:bodyPr>
+          <a:lstStyle/>
+          <a:p>
+            <a:pPr algn="ctr"/>
+            <a:r>
+              <a:rPr sz="4800" b="1" i="0">
                 <a:solidFill>
                   <a:srgbClr val="FFFFFF"/>
                 </a:solidFill>
@@ -4737,8 +4737,8 @@
         </p:nvSpPr>
         <p:spPr>
           <a:xfrm>
-            <a:off x="594360" y="2560320"/>
-            <a:ext cx="11002975" cy="384048"/>
+            <a:off x="640080" y="2418588"/>
+            <a:ext cx="10911535" cy="365760"/>
           </a:xfrm>
           <a:prstGeom prst="rect">
             <a:avLst/>
@@ -4755,7 +4755,7 @@
             <a:r>
               <a:rPr sz="2400" b="0" i="1">
                 <a:solidFill>
-                  <a:srgbClr val="B4B4B4"/>
+                  <a:srgbClr val="AAAAAA"/>
                 </a:solidFill>
                 <a:latin typeface="Arial"/>
               </a:rPr>
@@ -4772,8 +4772,78 @@
         </p:nvSpPr>
         <p:spPr>
           <a:xfrm>
-            <a:off x="594360" y="2980944"/>
-            <a:ext cx="11002975" cy="347472"/>
+            <a:off x="640080" y="2985516"/>
+            <a:ext cx="10911535" cy="731520"/>
+          </a:xfrm>
+          <a:prstGeom prst="rect">
+            <a:avLst/>
+          </a:prstGeom>
+          <a:noFill/>
+        </p:spPr>
+        <p:txBody>
+          <a:bodyPr wrap="square">
+            <a:spAutoFit/>
+          </a:bodyPr>
+          <a:lstStyle/>
+          <a:p>
+            <a:pPr algn="ctr"/>
+            <a:r>
+              <a:rPr sz="4800" b="1" i="0">
+                <a:solidFill>
+                  <a:srgbClr val="FFFFFF"/>
+                </a:solidFill>
+                <a:latin typeface="Arial"/>
+              </a:rPr>
+              <a:t>ほまれあれ</a:t>
+            </a:r>
+          </a:p>
+        </p:txBody>
+      </p:sp>
+      <p:sp>
+        <p:nvSpPr>
+          <p:cNvPr id="5" name="TextBox 4"/>
+          <p:cNvSpPr txBox="1"/>
+          <p:nvPr/>
+        </p:nvSpPr>
+        <p:spPr>
+          <a:xfrm>
+            <a:off x="640080" y="3753612"/>
+            <a:ext cx="10911535" cy="365760"/>
+          </a:xfrm>
+          <a:prstGeom prst="rect">
+            <a:avLst/>
+          </a:prstGeom>
+          <a:noFill/>
+        </p:spPr>
+        <p:txBody>
+          <a:bodyPr wrap="square">
+            <a:spAutoFit/>
+          </a:bodyPr>
+          <a:lstStyle/>
+          <a:p>
+            <a:pPr algn="ctr"/>
+            <a:r>
+              <a:rPr sz="2400" b="0" i="1">
+                <a:solidFill>
+                  <a:srgbClr val="AAAAAA"/>
+                </a:solidFill>
+                <a:latin typeface="Arial"/>
+              </a:rPr>
+              <a:t>homare are</a:t>
+            </a:r>
+          </a:p>
+        </p:txBody>
+      </p:sp>
+      <p:sp>
+        <p:nvSpPr>
+          <p:cNvPr id="6" name="TextBox 5"/>
+          <p:cNvSpPr txBox="1"/>
+          <p:nvPr/>
+        </p:nvSpPr>
+        <p:spPr>
+          <a:xfrm>
+            <a:off x="640080" y="4530852"/>
+            <a:ext cx="10911535" cy="310896"/>
           </a:xfrm>
           <a:prstGeom prst="rect">
             <a:avLst/>
@@ -4790,81 +4860,11 @@
             <a:r>
               <a:rPr sz="2000" b="0" i="1">
                 <a:solidFill>
-                  <a:srgbClr val="8C8C8C"/>
-                </a:solidFill>
-                <a:latin typeface="Arial"/>
-              </a:rPr>
-              <a:t/>
-            </a:r>
-          </a:p>
-        </p:txBody>
-      </p:sp>
-      <p:sp>
-        <p:nvSpPr>
-          <p:cNvPr id="5" name="TextBox 4"/>
-          <p:cNvSpPr txBox="1"/>
-          <p:nvPr/>
-        </p:nvSpPr>
-        <p:spPr>
-          <a:xfrm>
-            <a:off x="594360" y="3529584"/>
-            <a:ext cx="11002975" cy="685800"/>
-          </a:xfrm>
-          <a:prstGeom prst="rect">
-            <a:avLst/>
-          </a:prstGeom>
-          <a:noFill/>
-        </p:spPr>
-        <p:txBody>
-          <a:bodyPr wrap="square">
-            <a:spAutoFit/>
-          </a:bodyPr>
-          <a:lstStyle/>
-          <a:p>
-            <a:pPr algn="ctr"/>
-            <a:r>
-              <a:rPr sz="4400" b="1" i="0">
-                <a:solidFill>
-                  <a:srgbClr val="FFFFFF"/>
-                </a:solidFill>
-                <a:latin typeface="Arial"/>
-              </a:rPr>
-              <a:t>ほまれあれ</a:t>
-            </a:r>
-          </a:p>
-        </p:txBody>
-      </p:sp>
-      <p:sp>
-        <p:nvSpPr>
-          <p:cNvPr id="6" name="TextBox 5"/>
-          <p:cNvSpPr txBox="1"/>
-          <p:nvPr/>
-        </p:nvSpPr>
-        <p:spPr>
-          <a:xfrm>
-            <a:off x="594360" y="4251960"/>
-            <a:ext cx="11002975" cy="384048"/>
-          </a:xfrm>
-          <a:prstGeom prst="rect">
-            <a:avLst/>
-          </a:prstGeom>
-          <a:noFill/>
-        </p:spPr>
-        <p:txBody>
-          <a:bodyPr wrap="square">
-            <a:spAutoFit/>
-          </a:bodyPr>
-          <a:lstStyle/>
-          <a:p>
-            <a:pPr algn="ctr"/>
-            <a:r>
-              <a:rPr sz="2400" b="0" i="1">
-                <a:solidFill>
-                  <a:srgbClr val="B4B4B4"/>
-                </a:solidFill>
-                <a:latin typeface="Arial"/>
-              </a:rPr>
-              <a:t>homare are</a:t>
+                  <a:srgbClr val="828282"/>
+                </a:solidFill>
+                <a:latin typeface="Arial"/>
+              </a:rPr>
+              <a:t>Tu és Santo, Santo és Tu, Senhor Deus Todo-Poderoso</a:t>
             </a:r>
           </a:p>
         </p:txBody>
@@ -4877,8 +4877,8 @@
         </p:nvSpPr>
         <p:spPr>
           <a:xfrm>
-            <a:off x="594360" y="4672584"/>
-            <a:ext cx="11002975" cy="347472"/>
+            <a:off x="640080" y="4896612"/>
+            <a:ext cx="10911535" cy="310896"/>
           </a:xfrm>
           <a:prstGeom prst="rect">
             <a:avLst/>
@@ -4895,11 +4895,11 @@
             <a:r>
               <a:rPr sz="2000" b="0" i="1">
                 <a:solidFill>
-                  <a:srgbClr val="8C8C8C"/>
-                </a:solidFill>
-                <a:latin typeface="Arial"/>
-              </a:rPr>
-              <a:t/>
+                  <a:srgbClr val="828282"/>
+                </a:solidFill>
+                <a:latin typeface="Arial"/>
+              </a:rPr>
+              <a:t>Digno é o Cordeiro</a:t>
             </a:r>
           </a:p>
         </p:txBody>
@@ -4938,23 +4938,23 @@
         </p:nvSpPr>
         <p:spPr>
           <a:xfrm>
-            <a:off x="594360" y="2683764"/>
-            <a:ext cx="11002975" cy="685800"/>
-          </a:xfrm>
-          <a:prstGeom prst="rect">
-            <a:avLst/>
-          </a:prstGeom>
-          <a:noFill/>
-        </p:spPr>
-        <p:txBody>
-          <a:bodyPr wrap="square">
-            <a:spAutoFit/>
-          </a:bodyPr>
-          <a:lstStyle/>
-          <a:p>
-            <a:pPr algn="ctr"/>
-            <a:r>
-              <a:rPr sz="4400" b="1" i="0">
+            <a:off x="640080" y="2500884"/>
+            <a:ext cx="10911535" cy="731520"/>
+          </a:xfrm>
+          <a:prstGeom prst="rect">
+            <a:avLst/>
+          </a:prstGeom>
+          <a:noFill/>
+        </p:spPr>
+        <p:txBody>
+          <a:bodyPr wrap="square">
+            <a:spAutoFit/>
+          </a:bodyPr>
+          <a:lstStyle/>
+          <a:p>
+            <a:pPr algn="ctr"/>
+            <a:r>
+              <a:rPr sz="4800" b="1" i="0">
                 <a:solidFill>
                   <a:srgbClr val="FFFFFF"/>
                 </a:solidFill>
@@ -4973,8 +4973,8 @@
         </p:nvSpPr>
         <p:spPr>
           <a:xfrm>
-            <a:off x="594360" y="3406140"/>
-            <a:ext cx="11002975" cy="384048"/>
+            <a:off x="640080" y="3268980"/>
+            <a:ext cx="10911535" cy="365760"/>
           </a:xfrm>
           <a:prstGeom prst="rect">
             <a:avLst/>
@@ -4991,46 +4991,11 @@
             <a:r>
               <a:rPr sz="2400" b="0" i="1">
                 <a:solidFill>
-                  <a:srgbClr val="B4B4B4"/>
+                  <a:srgbClr val="AAAAAA"/>
                 </a:solidFill>
                 <a:latin typeface="Arial"/>
               </a:rPr>
               <a:t>a men</a:t>
-            </a:r>
-          </a:p>
-        </p:txBody>
-      </p:sp>
-      <p:sp>
-        <p:nvSpPr>
-          <p:cNvPr id="4" name="TextBox 3"/>
-          <p:cNvSpPr txBox="1"/>
-          <p:nvPr/>
-        </p:nvSpPr>
-        <p:spPr>
-          <a:xfrm>
-            <a:off x="594360" y="3826764"/>
-            <a:ext cx="11002975" cy="347472"/>
-          </a:xfrm>
-          <a:prstGeom prst="rect">
-            <a:avLst/>
-          </a:prstGeom>
-          <a:noFill/>
-        </p:spPr>
-        <p:txBody>
-          <a:bodyPr wrap="square">
-            <a:spAutoFit/>
-          </a:bodyPr>
-          <a:lstStyle/>
-          <a:p>
-            <a:pPr algn="ctr"/>
-            <a:r>
-              <a:rPr sz="2000" b="0" i="1">
-                <a:solidFill>
-                  <a:srgbClr val="8C8C8C"/>
-                </a:solidFill>
-                <a:latin typeface="Arial"/>
-              </a:rPr>
-              <a:t/>
             </a:r>
           </a:p>
         </p:txBody>
@@ -5069,23 +5034,23 @@
         </p:nvSpPr>
         <p:spPr>
           <a:xfrm>
-            <a:off x="594360" y="2894076"/>
-            <a:ext cx="11002975" cy="685800"/>
-          </a:xfrm>
-          <a:prstGeom prst="rect">
-            <a:avLst/>
-          </a:prstGeom>
-          <a:noFill/>
-        </p:spPr>
-        <p:txBody>
-          <a:bodyPr wrap="square">
-            <a:spAutoFit/>
-          </a:bodyPr>
-          <a:lstStyle/>
-          <a:p>
-            <a:pPr algn="ctr"/>
-            <a:r>
-              <a:rPr sz="3705" b="1" i="0">
+            <a:off x="640080" y="2702052"/>
+            <a:ext cx="10911535" cy="731520"/>
+          </a:xfrm>
+          <a:prstGeom prst="rect">
+            <a:avLst/>
+          </a:prstGeom>
+          <a:noFill/>
+        </p:spPr>
+        <p:txBody>
+          <a:bodyPr wrap="square">
+            <a:spAutoFit/>
+          </a:bodyPr>
+          <a:lstStyle/>
+          <a:p>
+            <a:pPr algn="ctr"/>
+            <a:r>
+              <a:rPr sz="4000" b="1" i="0">
                 <a:solidFill>
                   <a:srgbClr val="FFFFFF"/>
                 </a:solidFill>
@@ -5104,29 +5069,29 @@
         </p:nvSpPr>
         <p:spPr>
           <a:xfrm>
-            <a:off x="594360" y="3616452"/>
-            <a:ext cx="11002975" cy="347472"/>
-          </a:xfrm>
-          <a:prstGeom prst="rect">
-            <a:avLst/>
-          </a:prstGeom>
-          <a:noFill/>
-        </p:spPr>
-        <p:txBody>
-          <a:bodyPr wrap="square">
-            <a:spAutoFit/>
-          </a:bodyPr>
-          <a:lstStyle/>
-          <a:p>
-            <a:pPr algn="ctr"/>
-            <a:r>
-              <a:rPr sz="2200" b="0" i="1">
-                <a:solidFill>
-                  <a:srgbClr val="8C8C8C"/>
-                </a:solidFill>
-                <a:latin typeface="Arial"/>
-              </a:rPr>
-              <a:t/>
+            <a:off x="640080" y="3845052"/>
+            <a:ext cx="10911535" cy="310896"/>
+          </a:xfrm>
+          <a:prstGeom prst="rect">
+            <a:avLst/>
+          </a:prstGeom>
+          <a:noFill/>
+        </p:spPr>
+        <p:txBody>
+          <a:bodyPr wrap="square">
+            <a:spAutoFit/>
+          </a:bodyPr>
+          <a:lstStyle/>
+          <a:p>
+            <a:pPr algn="ctr"/>
+            <a:r>
+              <a:rPr sz="2000" b="0" i="0">
+                <a:solidFill>
+                  <a:srgbClr val="828282"/>
+                </a:solidFill>
+                <a:latin typeface="Arial"/>
+              </a:rPr>
+              <a:t>ハレ - ル - ヤ</a:t>
             </a:r>
           </a:p>
         </p:txBody>
@@ -5165,23 +5130,23 @@
         </p:nvSpPr>
         <p:spPr>
           <a:xfrm>
-            <a:off x="594360" y="2258568"/>
-            <a:ext cx="11002975" cy="685800"/>
-          </a:xfrm>
-          <a:prstGeom prst="rect">
-            <a:avLst/>
-          </a:prstGeom>
-          <a:noFill/>
-        </p:spPr>
-        <p:txBody>
-          <a:bodyPr wrap="square">
-            <a:spAutoFit/>
-          </a:bodyPr>
-          <a:lstStyle/>
-          <a:p>
-            <a:pPr algn="ctr"/>
-            <a:r>
-              <a:rPr sz="4400" b="1" i="0">
+            <a:off x="640080" y="2052828"/>
+            <a:ext cx="10911535" cy="731520"/>
+          </a:xfrm>
+          <a:prstGeom prst="rect">
+            <a:avLst/>
+          </a:prstGeom>
+          <a:noFill/>
+        </p:spPr>
+        <p:txBody>
+          <a:bodyPr wrap="square">
+            <a:spAutoFit/>
+          </a:bodyPr>
+          <a:lstStyle/>
+          <a:p>
+            <a:pPr algn="ctr"/>
+            <a:r>
+              <a:rPr sz="4800" b="1" i="0">
                 <a:solidFill>
                   <a:srgbClr val="FFFFFF"/>
                 </a:solidFill>
@@ -5200,29 +5165,29 @@
         </p:nvSpPr>
         <p:spPr>
           <a:xfrm>
-            <a:off x="594360" y="2980944"/>
-            <a:ext cx="11002975" cy="347472"/>
-          </a:xfrm>
-          <a:prstGeom prst="rect">
-            <a:avLst/>
-          </a:prstGeom>
-          <a:noFill/>
-        </p:spPr>
-        <p:txBody>
-          <a:bodyPr wrap="square">
-            <a:spAutoFit/>
-          </a:bodyPr>
-          <a:lstStyle/>
-          <a:p>
-            <a:pPr algn="ctr"/>
-            <a:r>
-              <a:rPr sz="2200" b="0" i="1">
-                <a:solidFill>
-                  <a:srgbClr val="8C8C8C"/>
-                </a:solidFill>
-                <a:latin typeface="Arial"/>
-              </a:rPr>
-              <a:t/>
+            <a:off x="640080" y="2985516"/>
+            <a:ext cx="10911535" cy="731520"/>
+          </a:xfrm>
+          <a:prstGeom prst="rect">
+            <a:avLst/>
+          </a:prstGeom>
+          <a:noFill/>
+        </p:spPr>
+        <p:txBody>
+          <a:bodyPr wrap="square">
+            <a:spAutoFit/>
+          </a:bodyPr>
+          <a:lstStyle/>
+          <a:p>
+            <a:pPr algn="ctr"/>
+            <a:r>
+              <a:rPr sz="4000" b="1" i="0">
+                <a:solidFill>
+                  <a:srgbClr val="FFFFFF"/>
+                </a:solidFill>
+                <a:latin typeface="Arial"/>
+              </a:rPr>
+              <a:t>Pois o Senhor Deus Todo-Poderoso reina</a:t>
             </a:r>
           </a:p>
         </p:txBody>
@@ -5235,29 +5200,29 @@
         </p:nvSpPr>
         <p:spPr>
           <a:xfrm>
-            <a:off x="594360" y="3529584"/>
-            <a:ext cx="11002975" cy="685800"/>
-          </a:xfrm>
-          <a:prstGeom prst="rect">
-            <a:avLst/>
-          </a:prstGeom>
-          <a:noFill/>
-        </p:spPr>
-        <p:txBody>
-          <a:bodyPr wrap="square">
-            <a:spAutoFit/>
-          </a:bodyPr>
-          <a:lstStyle/>
-          <a:p>
-            <a:pPr algn="ctr"/>
-            <a:r>
-              <a:rPr sz="3705" b="1" i="0">
-                <a:solidFill>
-                  <a:srgbClr val="FFFFFF"/>
-                </a:solidFill>
-                <a:latin typeface="Arial"/>
-              </a:rPr>
-              <a:t>Pois o Senhor Deus Todo-Poderoso reina</a:t>
+            <a:off x="640080" y="4128516"/>
+            <a:ext cx="10911535" cy="310896"/>
+          </a:xfrm>
+          <a:prstGeom prst="rect">
+            <a:avLst/>
+          </a:prstGeom>
+          <a:noFill/>
+        </p:spPr>
+        <p:txBody>
+          <a:bodyPr wrap="square">
+            <a:spAutoFit/>
+          </a:bodyPr>
+          <a:lstStyle/>
+          <a:p>
+            <a:pPr algn="ctr"/>
+            <a:r>
+              <a:rPr sz="2000" b="0" i="0">
+                <a:solidFill>
+                  <a:srgbClr val="828282"/>
+                </a:solidFill>
+                <a:latin typeface="Arial"/>
+              </a:rPr>
+              <a:t>せい なる　 せいなる</a:t>
             </a:r>
           </a:p>
         </p:txBody>
@@ -5270,29 +5235,29 @@
         </p:nvSpPr>
         <p:spPr>
           <a:xfrm>
-            <a:off x="594360" y="4251960"/>
-            <a:ext cx="11002975" cy="347472"/>
-          </a:xfrm>
-          <a:prstGeom prst="rect">
-            <a:avLst/>
-          </a:prstGeom>
-          <a:noFill/>
-        </p:spPr>
-        <p:txBody>
-          <a:bodyPr wrap="square">
-            <a:spAutoFit/>
-          </a:bodyPr>
-          <a:lstStyle/>
-          <a:p>
-            <a:pPr algn="ctr"/>
-            <a:r>
-              <a:rPr sz="2200" b="0" i="1">
-                <a:solidFill>
-                  <a:srgbClr val="8C8C8C"/>
-                </a:solidFill>
-                <a:latin typeface="Arial"/>
-              </a:rPr>
-              <a:t/>
+            <a:off x="640080" y="4494276"/>
+            <a:ext cx="10911535" cy="310896"/>
+          </a:xfrm>
+          <a:prstGeom prst="rect">
+            <a:avLst/>
+          </a:prstGeom>
+          <a:noFill/>
+        </p:spPr>
+        <p:txBody>
+          <a:bodyPr wrap="square">
+            <a:spAutoFit/>
+          </a:bodyPr>
+          <a:lstStyle/>
+          <a:p>
+            <a:pPr algn="ctr"/>
+            <a:r>
+              <a:rPr sz="2000" b="0" i="0">
+                <a:solidFill>
+                  <a:srgbClr val="828282"/>
+                </a:solidFill>
+                <a:latin typeface="Arial"/>
+              </a:rPr>
+              <a:t>ぜんのう  のわがかみ</a:t>
             </a:r>
           </a:p>
         </p:txBody>
@@ -5331,23 +5296,23 @@
         </p:nvSpPr>
         <p:spPr>
           <a:xfrm>
-            <a:off x="594360" y="2258568"/>
-            <a:ext cx="11002975" cy="685800"/>
-          </a:xfrm>
-          <a:prstGeom prst="rect">
-            <a:avLst/>
-          </a:prstGeom>
-          <a:noFill/>
-        </p:spPr>
-        <p:txBody>
-          <a:bodyPr wrap="square">
-            <a:spAutoFit/>
-          </a:bodyPr>
-          <a:lstStyle/>
-          <a:p>
-            <a:pPr algn="ctr"/>
-            <a:r>
-              <a:rPr sz="4400" b="1" i="0">
+            <a:off x="640080" y="2052828"/>
+            <a:ext cx="10911535" cy="731520"/>
+          </a:xfrm>
+          <a:prstGeom prst="rect">
+            <a:avLst/>
+          </a:prstGeom>
+          <a:noFill/>
+        </p:spPr>
+        <p:txBody>
+          <a:bodyPr wrap="square">
+            <a:spAutoFit/>
+          </a:bodyPr>
+          <a:lstStyle/>
+          <a:p>
+            <a:pPr algn="ctr"/>
+            <a:r>
+              <a:rPr sz="4800" b="1" i="0">
                 <a:solidFill>
                   <a:srgbClr val="FFFFFF"/>
                 </a:solidFill>
@@ -5366,29 +5331,29 @@
         </p:nvSpPr>
         <p:spPr>
           <a:xfrm>
-            <a:off x="594360" y="2980944"/>
-            <a:ext cx="11002975" cy="347472"/>
-          </a:xfrm>
-          <a:prstGeom prst="rect">
-            <a:avLst/>
-          </a:prstGeom>
-          <a:noFill/>
-        </p:spPr>
-        <p:txBody>
-          <a:bodyPr wrap="square">
-            <a:spAutoFit/>
-          </a:bodyPr>
-          <a:lstStyle/>
-          <a:p>
-            <a:pPr algn="ctr"/>
-            <a:r>
-              <a:rPr sz="2200" b="0" i="1">
-                <a:solidFill>
-                  <a:srgbClr val="8C8C8C"/>
-                </a:solidFill>
-                <a:latin typeface="Arial"/>
-              </a:rPr>
-              <a:t/>
+            <a:off x="640080" y="2985516"/>
+            <a:ext cx="10911535" cy="731520"/>
+          </a:xfrm>
+          <a:prstGeom prst="rect">
+            <a:avLst/>
+          </a:prstGeom>
+          <a:noFill/>
+        </p:spPr>
+        <p:txBody>
+          <a:bodyPr wrap="square">
+            <a:spAutoFit/>
+          </a:bodyPr>
+          <a:lstStyle/>
+          <a:p>
+            <a:pPr algn="ctr"/>
+            <a:r>
+              <a:rPr sz="3400" b="1" i="0">
+                <a:solidFill>
+                  <a:srgbClr val="FFFFFF"/>
+                </a:solidFill>
+                <a:latin typeface="Arial"/>
+              </a:rPr>
+              <a:t>Santo, Santo és Tu, Senhor Deus Todo-Poderoso</a:t>
             </a:r>
           </a:p>
         </p:txBody>
@@ -5401,29 +5366,29 @@
         </p:nvSpPr>
         <p:spPr>
           <a:xfrm>
-            <a:off x="594360" y="3529584"/>
-            <a:ext cx="11002975" cy="685800"/>
-          </a:xfrm>
-          <a:prstGeom prst="rect">
-            <a:avLst/>
-          </a:prstGeom>
-          <a:noFill/>
-        </p:spPr>
-        <p:txBody>
-          <a:bodyPr wrap="square">
-            <a:spAutoFit/>
-          </a:bodyPr>
-          <a:lstStyle/>
-          <a:p>
-            <a:pPr algn="ctr"/>
-            <a:r>
-              <a:rPr sz="3128" b="1" i="0">
-                <a:solidFill>
-                  <a:srgbClr val="FFFFFF"/>
-                </a:solidFill>
-                <a:latin typeface="Arial"/>
-              </a:rPr>
-              <a:t>Santo, Santo és Tu, Senhor Deus Todo-Poderoso</a:t>
+            <a:off x="640080" y="4128516"/>
+            <a:ext cx="10911535" cy="310896"/>
+          </a:xfrm>
+          <a:prstGeom prst="rect">
+            <a:avLst/>
+          </a:prstGeom>
+          <a:noFill/>
+        </p:spPr>
+        <p:txBody>
+          <a:bodyPr wrap="square">
+            <a:spAutoFit/>
+          </a:bodyPr>
+          <a:lstStyle/>
+          <a:p>
+            <a:pPr algn="ctr"/>
+            <a:r>
+              <a:rPr sz="2000" b="0" i="0">
+                <a:solidFill>
+                  <a:srgbClr val="828282"/>
+                </a:solidFill>
+                <a:latin typeface="Arial"/>
+              </a:rPr>
+              <a:t>こひつじに</a:t>
             </a:r>
           </a:p>
         </p:txBody>
@@ -5436,29 +5401,29 @@
         </p:nvSpPr>
         <p:spPr>
           <a:xfrm>
-            <a:off x="594360" y="4251960"/>
-            <a:ext cx="11002975" cy="347472"/>
-          </a:xfrm>
-          <a:prstGeom prst="rect">
-            <a:avLst/>
-          </a:prstGeom>
-          <a:noFill/>
-        </p:spPr>
-        <p:txBody>
-          <a:bodyPr wrap="square">
-            <a:spAutoFit/>
-          </a:bodyPr>
-          <a:lstStyle/>
-          <a:p>
-            <a:pPr algn="ctr"/>
-            <a:r>
-              <a:rPr sz="2200" b="0" i="1">
-                <a:solidFill>
-                  <a:srgbClr val="8C8C8C"/>
-                </a:solidFill>
-                <a:latin typeface="Arial"/>
-              </a:rPr>
-              <a:t/>
+            <a:off x="640080" y="4494276"/>
+            <a:ext cx="10911535" cy="310896"/>
+          </a:xfrm>
+          <a:prstGeom prst="rect">
+            <a:avLst/>
+          </a:prstGeom>
+          <a:noFill/>
+        </p:spPr>
+        <p:txBody>
+          <a:bodyPr wrap="square">
+            <a:spAutoFit/>
+          </a:bodyPr>
+          <a:lstStyle/>
+          <a:p>
+            <a:pPr algn="ctr"/>
+            <a:r>
+              <a:rPr sz="2000" b="0" i="0">
+                <a:solidFill>
+                  <a:srgbClr val="828282"/>
+                </a:solidFill>
+                <a:latin typeface="Arial"/>
+              </a:rPr>
+              <a:t>ほまれあれ</a:t>
             </a:r>
           </a:p>
         </p:txBody>
@@ -5497,23 +5462,23 @@
         </p:nvSpPr>
         <p:spPr>
           <a:xfrm>
-            <a:off x="594360" y="2258568"/>
-            <a:ext cx="11002975" cy="685800"/>
-          </a:xfrm>
-          <a:prstGeom prst="rect">
-            <a:avLst/>
-          </a:prstGeom>
-          <a:noFill/>
-        </p:spPr>
-        <p:txBody>
-          <a:bodyPr wrap="square">
-            <a:spAutoFit/>
-          </a:bodyPr>
-          <a:lstStyle/>
-          <a:p>
-            <a:pPr algn="ctr"/>
-            <a:r>
-              <a:rPr sz="4400" b="1" i="0">
+            <a:off x="640080" y="2052828"/>
+            <a:ext cx="10911535" cy="731520"/>
+          </a:xfrm>
+          <a:prstGeom prst="rect">
+            <a:avLst/>
+          </a:prstGeom>
+          <a:noFill/>
+        </p:spPr>
+        <p:txBody>
+          <a:bodyPr wrap="square">
+            <a:spAutoFit/>
+          </a:bodyPr>
+          <a:lstStyle/>
+          <a:p>
+            <a:pPr algn="ctr"/>
+            <a:r>
+              <a:rPr sz="4800" b="1" i="0">
                 <a:solidFill>
                   <a:srgbClr val="FFFFFF"/>
                 </a:solidFill>
@@ -5532,29 +5497,29 @@
         </p:nvSpPr>
         <p:spPr>
           <a:xfrm>
-            <a:off x="594360" y="2980944"/>
-            <a:ext cx="11002975" cy="347472"/>
-          </a:xfrm>
-          <a:prstGeom prst="rect">
-            <a:avLst/>
-          </a:prstGeom>
-          <a:noFill/>
-        </p:spPr>
-        <p:txBody>
-          <a:bodyPr wrap="square">
-            <a:spAutoFit/>
-          </a:bodyPr>
-          <a:lstStyle/>
-          <a:p>
-            <a:pPr algn="ctr"/>
-            <a:r>
-              <a:rPr sz="2200" b="0" i="1">
-                <a:solidFill>
-                  <a:srgbClr val="8C8C8C"/>
-                </a:solidFill>
-                <a:latin typeface="Arial"/>
-              </a:rPr>
-              <a:t/>
+            <a:off x="640080" y="2985516"/>
+            <a:ext cx="10911535" cy="731520"/>
+          </a:xfrm>
+          <a:prstGeom prst="rect">
+            <a:avLst/>
+          </a:prstGeom>
+          <a:noFill/>
+        </p:spPr>
+        <p:txBody>
+          <a:bodyPr wrap="square">
+            <a:spAutoFit/>
+          </a:bodyPr>
+          <a:lstStyle/>
+          <a:p>
+            <a:pPr algn="ctr"/>
+            <a:r>
+              <a:rPr sz="4800" b="1" i="0">
+                <a:solidFill>
+                  <a:srgbClr val="FFFFFF"/>
+                </a:solidFill>
+                <a:latin typeface="Arial"/>
+              </a:rPr>
+              <a:t>Digno é o Cordeiro</a:t>
             </a:r>
           </a:p>
         </p:txBody>
@@ -5567,29 +5532,29 @@
         </p:nvSpPr>
         <p:spPr>
           <a:xfrm>
-            <a:off x="594360" y="3529584"/>
-            <a:ext cx="11002975" cy="685800"/>
-          </a:xfrm>
-          <a:prstGeom prst="rect">
-            <a:avLst/>
-          </a:prstGeom>
-          <a:noFill/>
-        </p:spPr>
-        <p:txBody>
-          <a:bodyPr wrap="square">
-            <a:spAutoFit/>
-          </a:bodyPr>
-          <a:lstStyle/>
-          <a:p>
-            <a:pPr algn="ctr"/>
-            <a:r>
-              <a:rPr sz="4400" b="1" i="0">
-                <a:solidFill>
-                  <a:srgbClr val="FFFFFF"/>
-                </a:solidFill>
-                <a:latin typeface="Arial"/>
-              </a:rPr>
-              <a:t>Digno é o Cordeiro</a:t>
+            <a:off x="640080" y="4128516"/>
+            <a:ext cx="10911535" cy="310896"/>
+          </a:xfrm>
+          <a:prstGeom prst="rect">
+            <a:avLst/>
+          </a:prstGeom>
+          <a:noFill/>
+        </p:spPr>
+        <p:txBody>
+          <a:bodyPr wrap="square">
+            <a:spAutoFit/>
+          </a:bodyPr>
+          <a:lstStyle/>
+          <a:p>
+            <a:pPr algn="ctr"/>
+            <a:r>
+              <a:rPr sz="2000" b="0" i="0">
+                <a:solidFill>
+                  <a:srgbClr val="828282"/>
+                </a:solidFill>
+                <a:latin typeface="Arial"/>
+              </a:rPr>
+              <a:t>あなたは　 せいなる</a:t>
             </a:r>
           </a:p>
         </p:txBody>
@@ -5602,29 +5567,29 @@
         </p:nvSpPr>
         <p:spPr>
           <a:xfrm>
-            <a:off x="594360" y="4251960"/>
-            <a:ext cx="11002975" cy="347472"/>
-          </a:xfrm>
-          <a:prstGeom prst="rect">
-            <a:avLst/>
-          </a:prstGeom>
-          <a:noFill/>
-        </p:spPr>
-        <p:txBody>
-          <a:bodyPr wrap="square">
-            <a:spAutoFit/>
-          </a:bodyPr>
-          <a:lstStyle/>
-          <a:p>
-            <a:pPr algn="ctr"/>
-            <a:r>
-              <a:rPr sz="2200" b="0" i="1">
-                <a:solidFill>
-                  <a:srgbClr val="8C8C8C"/>
-                </a:solidFill>
-                <a:latin typeface="Arial"/>
-              </a:rPr>
-              <a:t/>
+            <a:off x="640080" y="4494276"/>
+            <a:ext cx="10911535" cy="310896"/>
+          </a:xfrm>
+          <a:prstGeom prst="rect">
+            <a:avLst/>
+          </a:prstGeom>
+          <a:noFill/>
+        </p:spPr>
+        <p:txBody>
+          <a:bodyPr wrap="square">
+            <a:spAutoFit/>
+          </a:bodyPr>
+          <a:lstStyle/>
+          <a:p>
+            <a:pPr algn="ctr"/>
+            <a:r>
+              <a:rPr sz="2000" b="0" i="0">
+                <a:solidFill>
+                  <a:srgbClr val="828282"/>
+                </a:solidFill>
+                <a:latin typeface="Arial"/>
+              </a:rPr>
+              <a:t>ぜんのう  のわがかみ</a:t>
             </a:r>
           </a:p>
         </p:txBody>
@@ -5663,23 +5628,23 @@
         </p:nvSpPr>
         <p:spPr>
           <a:xfrm>
-            <a:off x="594360" y="2258568"/>
-            <a:ext cx="11002975" cy="685800"/>
-          </a:xfrm>
-          <a:prstGeom prst="rect">
-            <a:avLst/>
-          </a:prstGeom>
-          <a:noFill/>
-        </p:spPr>
-        <p:txBody>
-          <a:bodyPr wrap="square">
-            <a:spAutoFit/>
-          </a:bodyPr>
-          <a:lstStyle/>
-          <a:p>
-            <a:pPr algn="ctr"/>
-            <a:r>
-              <a:rPr sz="2760" b="1" i="0">
+            <a:off x="640080" y="2052828"/>
+            <a:ext cx="10911535" cy="731520"/>
+          </a:xfrm>
+          <a:prstGeom prst="rect">
+            <a:avLst/>
+          </a:prstGeom>
+          <a:noFill/>
+        </p:spPr>
+        <p:txBody>
+          <a:bodyPr wrap="square">
+            <a:spAutoFit/>
+          </a:bodyPr>
+          <a:lstStyle/>
+          <a:p>
+            <a:pPr algn="ctr"/>
+            <a:r>
+              <a:rPr sz="3000" b="1" i="0">
                 <a:solidFill>
                   <a:srgbClr val="FFFFFF"/>
                 </a:solidFill>
@@ -5698,29 +5663,29 @@
         </p:nvSpPr>
         <p:spPr>
           <a:xfrm>
-            <a:off x="594360" y="2980944"/>
-            <a:ext cx="11002975" cy="347472"/>
-          </a:xfrm>
-          <a:prstGeom prst="rect">
-            <a:avLst/>
-          </a:prstGeom>
-          <a:noFill/>
-        </p:spPr>
-        <p:txBody>
-          <a:bodyPr wrap="square">
-            <a:spAutoFit/>
-          </a:bodyPr>
-          <a:lstStyle/>
-          <a:p>
-            <a:pPr algn="ctr"/>
-            <a:r>
-              <a:rPr sz="2200" b="0" i="1">
-                <a:solidFill>
-                  <a:srgbClr val="8C8C8C"/>
-                </a:solidFill>
-                <a:latin typeface="Arial"/>
-              </a:rPr>
-              <a:t/>
+            <a:off x="640080" y="2985516"/>
+            <a:ext cx="10911535" cy="731520"/>
+          </a:xfrm>
+          <a:prstGeom prst="rect">
+            <a:avLst/>
+          </a:prstGeom>
+          <a:noFill/>
+        </p:spPr>
+        <p:txBody>
+          <a:bodyPr wrap="square">
+            <a:spAutoFit/>
+          </a:bodyPr>
+          <a:lstStyle/>
+          <a:p>
+            <a:pPr algn="ctr"/>
+            <a:r>
+              <a:rPr sz="4800" b="1" i="0">
+                <a:solidFill>
+                  <a:srgbClr val="FFFFFF"/>
+                </a:solidFill>
+                <a:latin typeface="Arial"/>
+              </a:rPr>
+              <a:t>Digno é o Cordeiro</a:t>
             </a:r>
           </a:p>
         </p:txBody>
@@ -5733,29 +5698,29 @@
         </p:nvSpPr>
         <p:spPr>
           <a:xfrm>
-            <a:off x="594360" y="3529584"/>
-            <a:ext cx="11002975" cy="685800"/>
-          </a:xfrm>
-          <a:prstGeom prst="rect">
-            <a:avLst/>
-          </a:prstGeom>
-          <a:noFill/>
-        </p:spPr>
-        <p:txBody>
-          <a:bodyPr wrap="square">
-            <a:spAutoFit/>
-          </a:bodyPr>
-          <a:lstStyle/>
-          <a:p>
-            <a:pPr algn="ctr"/>
-            <a:r>
-              <a:rPr sz="4400" b="1" i="0">
-                <a:solidFill>
-                  <a:srgbClr val="FFFFFF"/>
-                </a:solidFill>
-                <a:latin typeface="Arial"/>
-              </a:rPr>
-              <a:t>Digno é o Cordeiro</a:t>
+            <a:off x="640080" y="4128516"/>
+            <a:ext cx="10911535" cy="310896"/>
+          </a:xfrm>
+          <a:prstGeom prst="rect">
+            <a:avLst/>
+          </a:prstGeom>
+          <a:noFill/>
+        </p:spPr>
+        <p:txBody>
+          <a:bodyPr wrap="square">
+            <a:spAutoFit/>
+          </a:bodyPr>
+          <a:lstStyle/>
+          <a:p>
+            <a:pPr algn="ctr"/>
+            <a:r>
+              <a:rPr sz="2000" b="0" i="0">
+                <a:solidFill>
+                  <a:srgbClr val="828282"/>
+                </a:solidFill>
+                <a:latin typeface="Arial"/>
+              </a:rPr>
+              <a:t>こひつじに</a:t>
             </a:r>
           </a:p>
         </p:txBody>
@@ -5768,29 +5733,29 @@
         </p:nvSpPr>
         <p:spPr>
           <a:xfrm>
-            <a:off x="594360" y="4251960"/>
-            <a:ext cx="11002975" cy="347472"/>
-          </a:xfrm>
-          <a:prstGeom prst="rect">
-            <a:avLst/>
-          </a:prstGeom>
-          <a:noFill/>
-        </p:spPr>
-        <p:txBody>
-          <a:bodyPr wrap="square">
-            <a:spAutoFit/>
-          </a:bodyPr>
-          <a:lstStyle/>
-          <a:p>
-            <a:pPr algn="ctr"/>
-            <a:r>
-              <a:rPr sz="2200" b="0" i="1">
-                <a:solidFill>
-                  <a:srgbClr val="8C8C8C"/>
-                </a:solidFill>
-                <a:latin typeface="Arial"/>
-              </a:rPr>
-              <a:t/>
+            <a:off x="640080" y="4494276"/>
+            <a:ext cx="10911535" cy="310896"/>
+          </a:xfrm>
+          <a:prstGeom prst="rect">
+            <a:avLst/>
+          </a:prstGeom>
+          <a:noFill/>
+        </p:spPr>
+        <p:txBody>
+          <a:bodyPr wrap="square">
+            <a:spAutoFit/>
+          </a:bodyPr>
+          <a:lstStyle/>
+          <a:p>
+            <a:pPr algn="ctr"/>
+            <a:r>
+              <a:rPr sz="2000" b="0" i="0">
+                <a:solidFill>
+                  <a:srgbClr val="828282"/>
+                </a:solidFill>
+                <a:latin typeface="Arial"/>
+              </a:rPr>
+              <a:t>ほまれあれ</a:t>
             </a:r>
           </a:p>
         </p:txBody>
@@ -5829,23 +5794,23 @@
         </p:nvSpPr>
         <p:spPr>
           <a:xfrm>
-            <a:off x="594360" y="1837944"/>
-            <a:ext cx="11002975" cy="685800"/>
-          </a:xfrm>
-          <a:prstGeom prst="rect">
-            <a:avLst/>
-          </a:prstGeom>
-          <a:noFill/>
-        </p:spPr>
-        <p:txBody>
-          <a:bodyPr wrap="square">
-            <a:spAutoFit/>
-          </a:bodyPr>
-          <a:lstStyle/>
-          <a:p>
-            <a:pPr algn="ctr"/>
-            <a:r>
-              <a:rPr sz="4400" b="1" i="0">
+            <a:off x="640080" y="1650492"/>
+            <a:ext cx="10911535" cy="731520"/>
+          </a:xfrm>
+          <a:prstGeom prst="rect">
+            <a:avLst/>
+          </a:prstGeom>
+          <a:noFill/>
+        </p:spPr>
+        <p:txBody>
+          <a:bodyPr wrap="square">
+            <a:spAutoFit/>
+          </a:bodyPr>
+          <a:lstStyle/>
+          <a:p>
+            <a:pPr algn="ctr"/>
+            <a:r>
+              <a:rPr sz="4800" b="1" i="0">
                 <a:solidFill>
                   <a:srgbClr val="FFFFFF"/>
                 </a:solidFill>
@@ -5864,8 +5829,8 @@
         </p:nvSpPr>
         <p:spPr>
           <a:xfrm>
-            <a:off x="594360" y="2560320"/>
-            <a:ext cx="11002975" cy="384048"/>
+            <a:off x="640080" y="2418588"/>
+            <a:ext cx="10911535" cy="365760"/>
           </a:xfrm>
           <a:prstGeom prst="rect">
             <a:avLst/>
@@ -5882,7 +5847,7 @@
             <a:r>
               <a:rPr sz="2400" b="0" i="1">
                 <a:solidFill>
-                  <a:srgbClr val="B4B4B4"/>
+                  <a:srgbClr val="AAAAAA"/>
                 </a:solidFill>
                 <a:latin typeface="Arial"/>
               </a:rPr>
@@ -5899,8 +5864,78 @@
         </p:nvSpPr>
         <p:spPr>
           <a:xfrm>
-            <a:off x="594360" y="2980944"/>
-            <a:ext cx="11002975" cy="347472"/>
+            <a:off x="640080" y="2985516"/>
+            <a:ext cx="10911535" cy="731520"/>
+          </a:xfrm>
+          <a:prstGeom prst="rect">
+            <a:avLst/>
+          </a:prstGeom>
+          <a:noFill/>
+        </p:spPr>
+        <p:txBody>
+          <a:bodyPr wrap="square">
+            <a:spAutoFit/>
+          </a:bodyPr>
+          <a:lstStyle/>
+          <a:p>
+            <a:pPr algn="ctr"/>
+            <a:r>
+              <a:rPr sz="4800" b="1" i="0">
+                <a:solidFill>
+                  <a:srgbClr val="FFFFFF"/>
+                </a:solidFill>
+                <a:latin typeface="Arial"/>
+              </a:rPr>
+              <a:t>ぜんのう の　おうなるしゅ</a:t>
+            </a:r>
+          </a:p>
+        </p:txBody>
+      </p:sp>
+      <p:sp>
+        <p:nvSpPr>
+          <p:cNvPr id="5" name="TextBox 4"/>
+          <p:cNvSpPr txBox="1"/>
+          <p:nvPr/>
+        </p:nvSpPr>
+        <p:spPr>
+          <a:xfrm>
+            <a:off x="640080" y="3753612"/>
+            <a:ext cx="10911535" cy="365760"/>
+          </a:xfrm>
+          <a:prstGeom prst="rect">
+            <a:avLst/>
+          </a:prstGeom>
+          <a:noFill/>
+        </p:spPr>
+        <p:txBody>
+          <a:bodyPr wrap="square">
+            <a:spAutoFit/>
+          </a:bodyPr>
+          <a:lstStyle/>
+          <a:p>
+            <a:pPr algn="ctr"/>
+            <a:r>
+              <a:rPr sz="2400" b="0" i="1">
+                <a:solidFill>
+                  <a:srgbClr val="AAAAAA"/>
+                </a:solidFill>
+                <a:latin typeface="Arial"/>
+              </a:rPr>
+              <a:t>zennou no ounarushu</a:t>
+            </a:r>
+          </a:p>
+        </p:txBody>
+      </p:sp>
+      <p:sp>
+        <p:nvSpPr>
+          <p:cNvPr id="6" name="TextBox 5"/>
+          <p:cNvSpPr txBox="1"/>
+          <p:nvPr/>
+        </p:nvSpPr>
+        <p:spPr>
+          <a:xfrm>
+            <a:off x="640080" y="4530852"/>
+            <a:ext cx="10911535" cy="310896"/>
           </a:xfrm>
           <a:prstGeom prst="rect">
             <a:avLst/>
@@ -5917,81 +5952,11 @@
             <a:r>
               <a:rPr sz="2000" b="0" i="1">
                 <a:solidFill>
-                  <a:srgbClr val="8C8C8C"/>
-                </a:solidFill>
-                <a:latin typeface="Arial"/>
-              </a:rPr>
-              <a:t/>
-            </a:r>
-          </a:p>
-        </p:txBody>
-      </p:sp>
-      <p:sp>
-        <p:nvSpPr>
-          <p:cNvPr id="5" name="TextBox 4"/>
-          <p:cNvSpPr txBox="1"/>
-          <p:nvPr/>
-        </p:nvSpPr>
-        <p:spPr>
-          <a:xfrm>
-            <a:off x="594360" y="3529584"/>
-            <a:ext cx="11002975" cy="685800"/>
-          </a:xfrm>
-          <a:prstGeom prst="rect">
-            <a:avLst/>
-          </a:prstGeom>
-          <a:noFill/>
-        </p:spPr>
-        <p:txBody>
-          <a:bodyPr wrap="square">
-            <a:spAutoFit/>
-          </a:bodyPr>
-          <a:lstStyle/>
-          <a:p>
-            <a:pPr algn="ctr"/>
-            <a:r>
-              <a:rPr sz="4400" b="1" i="0">
-                <a:solidFill>
-                  <a:srgbClr val="FFFFFF"/>
-                </a:solidFill>
-                <a:latin typeface="Arial"/>
-              </a:rPr>
-              <a:t>ぜんのう の　おうなるしゅ</a:t>
-            </a:r>
-          </a:p>
-        </p:txBody>
-      </p:sp>
-      <p:sp>
-        <p:nvSpPr>
-          <p:cNvPr id="6" name="TextBox 5"/>
-          <p:cNvSpPr txBox="1"/>
-          <p:nvPr/>
-        </p:nvSpPr>
-        <p:spPr>
-          <a:xfrm>
-            <a:off x="594360" y="4251960"/>
-            <a:ext cx="11002975" cy="384048"/>
-          </a:xfrm>
-          <a:prstGeom prst="rect">
-            <a:avLst/>
-          </a:prstGeom>
-          <a:noFill/>
-        </p:spPr>
-        <p:txBody>
-          <a:bodyPr wrap="square">
-            <a:spAutoFit/>
-          </a:bodyPr>
-          <a:lstStyle/>
-          <a:p>
-            <a:pPr algn="ctr"/>
-            <a:r>
-              <a:rPr sz="2400" b="0" i="1">
-                <a:solidFill>
-                  <a:srgbClr val="B4B4B4"/>
-                </a:solidFill>
-                <a:latin typeface="Arial"/>
-              </a:rPr>
-              <a:t>zennou no ounarushu</a:t>
+                  <a:srgbClr val="828282"/>
+                </a:solidFill>
+                <a:latin typeface="Arial"/>
+              </a:rPr>
+              <a:t>Agnus Dei</a:t>
             </a:r>
           </a:p>
         </p:txBody>
@@ -6004,8 +5969,8 @@
         </p:nvSpPr>
         <p:spPr>
           <a:xfrm>
-            <a:off x="594360" y="4672584"/>
-            <a:ext cx="11002975" cy="347472"/>
+            <a:off x="640080" y="4896612"/>
+            <a:ext cx="10911535" cy="310896"/>
           </a:xfrm>
           <a:prstGeom prst="rect">
             <a:avLst/>
@@ -6022,11 +5987,11 @@
             <a:r>
               <a:rPr sz="2000" b="0" i="1">
                 <a:solidFill>
-                  <a:srgbClr val="8C8C8C"/>
-                </a:solidFill>
-                <a:latin typeface="Arial"/>
-              </a:rPr>
-              <a:t/>
+                  <a:srgbClr val="828282"/>
+                </a:solidFill>
+                <a:latin typeface="Arial"/>
+              </a:rPr>
+              <a:t>Aleluia, Aleluia</a:t>
             </a:r>
           </a:p>
         </p:txBody>
@@ -6065,23 +6030,23 @@
         </p:nvSpPr>
         <p:spPr>
           <a:xfrm>
-            <a:off x="594360" y="2683764"/>
-            <a:ext cx="11002975" cy="685800"/>
-          </a:xfrm>
-          <a:prstGeom prst="rect">
-            <a:avLst/>
-          </a:prstGeom>
-          <a:noFill/>
-        </p:spPr>
-        <p:txBody>
-          <a:bodyPr wrap="square">
-            <a:spAutoFit/>
-          </a:bodyPr>
-          <a:lstStyle/>
-          <a:p>
-            <a:pPr algn="ctr"/>
-            <a:r>
-              <a:rPr sz="4400" b="1" i="0">
+            <a:off x="640080" y="2500884"/>
+            <a:ext cx="10911535" cy="731520"/>
+          </a:xfrm>
+          <a:prstGeom prst="rect">
+            <a:avLst/>
+          </a:prstGeom>
+          <a:noFill/>
+        </p:spPr>
+        <p:txBody>
+          <a:bodyPr wrap="square">
+            <a:spAutoFit/>
+          </a:bodyPr>
+          <a:lstStyle/>
+          <a:p>
+            <a:pPr algn="ctr"/>
+            <a:r>
+              <a:rPr sz="4800" b="1" i="0">
                 <a:solidFill>
                   <a:srgbClr val="FFFFFF"/>
                 </a:solidFill>
@@ -6100,8 +6065,8 @@
         </p:nvSpPr>
         <p:spPr>
           <a:xfrm>
-            <a:off x="594360" y="3406140"/>
-            <a:ext cx="11002975" cy="384048"/>
+            <a:off x="640080" y="3268980"/>
+            <a:ext cx="10911535" cy="365760"/>
           </a:xfrm>
           <a:prstGeom prst="rect">
             <a:avLst/>
@@ -6118,7 +6083,7 @@
             <a:r>
               <a:rPr sz="2400" b="0" i="1">
                 <a:solidFill>
-                  <a:srgbClr val="B4B4B4"/>
+                  <a:srgbClr val="AAAAAA"/>
                 </a:solidFill>
                 <a:latin typeface="Arial"/>
               </a:rPr>
@@ -6135,8 +6100,8 @@
         </p:nvSpPr>
         <p:spPr>
           <a:xfrm>
-            <a:off x="594360" y="3826764"/>
-            <a:ext cx="11002975" cy="347472"/>
+            <a:off x="640080" y="4046220"/>
+            <a:ext cx="10911535" cy="310896"/>
           </a:xfrm>
           <a:prstGeom prst="rect">
             <a:avLst/>
@@ -6153,11 +6118,11 @@
             <a:r>
               <a:rPr sz="2000" b="0" i="1">
                 <a:solidFill>
-                  <a:srgbClr val="8C8C8C"/>
-                </a:solidFill>
-                <a:latin typeface="Arial"/>
-              </a:rPr>
-              <a:t/>
+                  <a:srgbClr val="828282"/>
+                </a:solidFill>
+                <a:latin typeface="Arial"/>
+              </a:rPr>
+              <a:t>Pois o Senhor Deus Todo-Poderoso reina</a:t>
             </a:r>
           </a:p>
         </p:txBody>
@@ -6196,23 +6161,23 @@
         </p:nvSpPr>
         <p:spPr>
           <a:xfrm>
-            <a:off x="594360" y="1837944"/>
-            <a:ext cx="11002975" cy="685800"/>
-          </a:xfrm>
-          <a:prstGeom prst="rect">
-            <a:avLst/>
-          </a:prstGeom>
-          <a:noFill/>
-        </p:spPr>
-        <p:txBody>
-          <a:bodyPr wrap="square">
-            <a:spAutoFit/>
-          </a:bodyPr>
-          <a:lstStyle/>
-          <a:p>
-            <a:pPr algn="ctr"/>
-            <a:r>
-              <a:rPr sz="4400" b="1" i="0">
+            <a:off x="640080" y="1650492"/>
+            <a:ext cx="10911535" cy="731520"/>
+          </a:xfrm>
+          <a:prstGeom prst="rect">
+            <a:avLst/>
+          </a:prstGeom>
+          <a:noFill/>
+        </p:spPr>
+        <p:txBody>
+          <a:bodyPr wrap="square">
+            <a:spAutoFit/>
+          </a:bodyPr>
+          <a:lstStyle/>
+          <a:p>
+            <a:pPr algn="ctr"/>
+            <a:r>
+              <a:rPr sz="4800" b="1" i="0">
                 <a:solidFill>
                   <a:srgbClr val="FFFFFF"/>
                 </a:solidFill>
@@ -6231,8 +6196,8 @@
         </p:nvSpPr>
         <p:spPr>
           <a:xfrm>
-            <a:off x="594360" y="2560320"/>
-            <a:ext cx="11002975" cy="384048"/>
+            <a:off x="640080" y="2418588"/>
+            <a:ext cx="10911535" cy="365760"/>
           </a:xfrm>
           <a:prstGeom prst="rect">
             <a:avLst/>
@@ -6249,7 +6214,7 @@
             <a:r>
               <a:rPr sz="2400" b="0" i="1">
                 <a:solidFill>
-                  <a:srgbClr val="B4B4B4"/>
+                  <a:srgbClr val="AAAAAA"/>
                 </a:solidFill>
                 <a:latin typeface="Arial"/>
               </a:rPr>
@@ -6266,8 +6231,78 @@
         </p:nvSpPr>
         <p:spPr>
           <a:xfrm>
-            <a:off x="594360" y="2980944"/>
-            <a:ext cx="11002975" cy="347472"/>
+            <a:off x="640080" y="2985516"/>
+            <a:ext cx="10911535" cy="731520"/>
+          </a:xfrm>
+          <a:prstGeom prst="rect">
+            <a:avLst/>
+          </a:prstGeom>
+          <a:noFill/>
+        </p:spPr>
+        <p:txBody>
+          <a:bodyPr wrap="square">
+            <a:spAutoFit/>
+          </a:bodyPr>
+          <a:lstStyle/>
+          <a:p>
+            <a:pPr algn="ctr"/>
+            <a:r>
+              <a:rPr sz="4800" b="1" i="0">
+                <a:solidFill>
+                  <a:srgbClr val="FFFFFF"/>
+                </a:solidFill>
+                <a:latin typeface="Arial"/>
+              </a:rPr>
+              <a:t>ぜんのう  のわがかみ</a:t>
+            </a:r>
+          </a:p>
+        </p:txBody>
+      </p:sp>
+      <p:sp>
+        <p:nvSpPr>
+          <p:cNvPr id="5" name="TextBox 4"/>
+          <p:cNvSpPr txBox="1"/>
+          <p:nvPr/>
+        </p:nvSpPr>
+        <p:spPr>
+          <a:xfrm>
+            <a:off x="640080" y="3753612"/>
+            <a:ext cx="10911535" cy="365760"/>
+          </a:xfrm>
+          <a:prstGeom prst="rect">
+            <a:avLst/>
+          </a:prstGeom>
+          <a:noFill/>
+        </p:spPr>
+        <p:txBody>
+          <a:bodyPr wrap="square">
+            <a:spAutoFit/>
+          </a:bodyPr>
+          <a:lstStyle/>
+          <a:p>
+            <a:pPr algn="ctr"/>
+            <a:r>
+              <a:rPr sz="2400" b="0" i="1">
+                <a:solidFill>
+                  <a:srgbClr val="AAAAAA"/>
+                </a:solidFill>
+                <a:latin typeface="Arial"/>
+              </a:rPr>
+              <a:t>zennou  no waga kami</a:t>
+            </a:r>
+          </a:p>
+        </p:txBody>
+      </p:sp>
+      <p:sp>
+        <p:nvSpPr>
+          <p:cNvPr id="6" name="TextBox 5"/>
+          <p:cNvSpPr txBox="1"/>
+          <p:nvPr/>
+        </p:nvSpPr>
+        <p:spPr>
+          <a:xfrm>
+            <a:off x="640080" y="4530852"/>
+            <a:ext cx="10911535" cy="310896"/>
           </a:xfrm>
           <a:prstGeom prst="rect">
             <a:avLst/>
@@ -6284,81 +6319,11 @@
             <a:r>
               <a:rPr sz="2000" b="0" i="1">
                 <a:solidFill>
-                  <a:srgbClr val="8C8C8C"/>
-                </a:solidFill>
-                <a:latin typeface="Arial"/>
-              </a:rPr>
-              <a:t/>
-            </a:r>
-          </a:p>
-        </p:txBody>
-      </p:sp>
-      <p:sp>
-        <p:nvSpPr>
-          <p:cNvPr id="5" name="TextBox 4"/>
-          <p:cNvSpPr txBox="1"/>
-          <p:nvPr/>
-        </p:nvSpPr>
-        <p:spPr>
-          <a:xfrm>
-            <a:off x="594360" y="3529584"/>
-            <a:ext cx="11002975" cy="685800"/>
-          </a:xfrm>
-          <a:prstGeom prst="rect">
-            <a:avLst/>
-          </a:prstGeom>
-          <a:noFill/>
-        </p:spPr>
-        <p:txBody>
-          <a:bodyPr wrap="square">
-            <a:spAutoFit/>
-          </a:bodyPr>
-          <a:lstStyle/>
-          <a:p>
-            <a:pPr algn="ctr"/>
-            <a:r>
-              <a:rPr sz="4400" b="1" i="0">
-                <a:solidFill>
-                  <a:srgbClr val="FFFFFF"/>
-                </a:solidFill>
-                <a:latin typeface="Arial"/>
-              </a:rPr>
-              <a:t>ぜんのう  のわがかみ</a:t>
-            </a:r>
-          </a:p>
-        </p:txBody>
-      </p:sp>
-      <p:sp>
-        <p:nvSpPr>
-          <p:cNvPr id="6" name="TextBox 5"/>
-          <p:cNvSpPr txBox="1"/>
-          <p:nvPr/>
-        </p:nvSpPr>
-        <p:spPr>
-          <a:xfrm>
-            <a:off x="594360" y="4251960"/>
-            <a:ext cx="11002975" cy="384048"/>
-          </a:xfrm>
-          <a:prstGeom prst="rect">
-            <a:avLst/>
-          </a:prstGeom>
-          <a:noFill/>
-        </p:spPr>
-        <p:txBody>
-          <a:bodyPr wrap="square">
-            <a:spAutoFit/>
-          </a:bodyPr>
-          <a:lstStyle/>
-          <a:p>
-            <a:pPr algn="ctr"/>
-            <a:r>
-              <a:rPr sz="2400" b="0" i="1">
-                <a:solidFill>
-                  <a:srgbClr val="B4B4B4"/>
-                </a:solidFill>
-                <a:latin typeface="Arial"/>
-              </a:rPr>
-              <a:t>zennou  no waga kami</a:t>
+                  <a:srgbClr val="828282"/>
+                </a:solidFill>
+                <a:latin typeface="Arial"/>
+              </a:rPr>
+              <a:t>Aleluia, Aleluia</a:t>
             </a:r>
           </a:p>
         </p:txBody>
@@ -6371,8 +6336,8 @@
         </p:nvSpPr>
         <p:spPr>
           <a:xfrm>
-            <a:off x="594360" y="4672584"/>
-            <a:ext cx="11002975" cy="347472"/>
+            <a:off x="640080" y="4896612"/>
+            <a:ext cx="10911535" cy="310896"/>
           </a:xfrm>
           <a:prstGeom prst="rect">
             <a:avLst/>
@@ -6389,11 +6354,11 @@
             <a:r>
               <a:rPr sz="2000" b="0" i="1">
                 <a:solidFill>
-                  <a:srgbClr val="8C8C8C"/>
-                </a:solidFill>
-                <a:latin typeface="Arial"/>
-              </a:rPr>
-              <a:t/>
+                  <a:srgbClr val="828282"/>
+                </a:solidFill>
+                <a:latin typeface="Arial"/>
+              </a:rPr>
+              <a:t>Pois o Senhor Deus Todo-Poderoso reina</a:t>
             </a:r>
           </a:p>
         </p:txBody>

--- a/output_pptx/Agnus_Dei.pptx
+++ b/output_pptx/Agnus_Dei.pptx
@@ -4996,6 +4996,41 @@
                 <a:latin typeface="Arial"/>
               </a:rPr>
               <a:t>a men</a:t>
+            </a:r>
+          </a:p>
+        </p:txBody>
+      </p:sp>
+      <p:sp>
+        <p:nvSpPr>
+          <p:cNvPr id="4" name="TextBox 3"/>
+          <p:cNvSpPr txBox="1"/>
+          <p:nvPr/>
+        </p:nvSpPr>
+        <p:spPr>
+          <a:xfrm>
+            <a:off x="640080" y="4046220"/>
+            <a:ext cx="10911535" cy="310896"/>
+          </a:xfrm>
+          <a:prstGeom prst="rect">
+            <a:avLst/>
+          </a:prstGeom>
+          <a:noFill/>
+        </p:spPr>
+        <p:txBody>
+          <a:bodyPr wrap="square">
+            <a:spAutoFit/>
+          </a:bodyPr>
+          <a:lstStyle/>
+          <a:p>
+            <a:pPr algn="ctr"/>
+            <a:r>
+              <a:rPr sz="2000" b="0" i="1">
+                <a:solidFill>
+                  <a:srgbClr val="828282"/>
+                </a:solidFill>
+                <a:latin typeface="Arial"/>
+              </a:rPr>
+              <a:t>A - mém</a:t>
             </a:r>
           </a:p>
         </p:txBody>
